--- a/Fluctus_Laadplan_Lommel.pptx
+++ b/Fluctus_Laadplan_Lommel.pptx
@@ -16,9 +16,10 @@
     <p:sldId id="264" r:id="rId10"/>
     <p:sldId id="265" r:id="rId11"/>
     <p:sldId id="266" r:id="rId12"/>
+    <p:sldId id="267" r:id="rId13"/>
   </p:sldIdLst>
   <p:notesMasterIdLst>
-    <p:notesMasterId r:id="rId13"/>
+    <p:notesMasterId r:id="rId14"/>
   </p:notesMasterIdLst>
   <p:sldSz cx="12192000" cy="6858000"/>
   <p:notesSz cx="6858000" cy="12192000"/>
@@ -157,7 +158,7 @@
               <a:lstStyle/>
               <a:p>
                 <a:pPr>
-                  <a:defRPr b="1" i="0" strike="noStrike" sz="1400" u="none">
+                  <a:defRPr b="1" i="0" strike="noStrike" sz="1300" u="none">
                     <a:solidFill>
                       <a:srgbClr val="1A1A1A"/>
                     </a:solidFill>
@@ -206,7 +207,7 @@
                     <c:v>Vandaag</c:v>
                   </c:pt>
                   <c:pt idx="1">
-                    <c:v>Met slim laden (2030)</c:v>
+                    <c:v>Met slim laden</c:v>
                   </c:pt>
                 </c:lvl>
               </c:multiLvlStrCache>
@@ -219,10 +220,10 @@
                 <c:formatCode>General</c:formatCode>
                 <c:ptCount val="2"/>
                 <c:pt idx="0">
-                  <c:v>33</c:v>
+                  <c:v>34</c:v>
                 </c:pt>
                 <c:pt idx="1">
-                  <c:v>42</c:v>
+                  <c:v>65</c:v>
                 </c:pt>
               </c:numCache>
             </c:numRef>
@@ -235,7 +236,7 @@
             <a:lstStyle/>
             <a:p>
               <a:pPr>
-                <a:defRPr b="1" i="0" strike="noStrike" sz="1400" u="none">
+                <a:defRPr b="1" i="0" strike="noStrike" sz="1300" u="none">
                   <a:solidFill>
                     <a:srgbClr val="1A1A1A"/>
                   </a:solidFill>
@@ -283,7 +284,7 @@
           <a:lstStyle/>
           <a:p>
             <a:pPr>
-              <a:defRPr sz="1200" b="0" i="0" u="none" strike="noStrike">
+              <a:defRPr sz="1100" b="0" i="0" u="none" strike="noStrike">
                 <a:solidFill>
                   <a:srgbClr val="1A1A1A"/>
                 </a:solidFill>
@@ -303,7 +304,7 @@
         <c:axId val="2094734552"/>
         <c:scaling>
           <c:orientation val="minMax"/>
-          <c:max val="50"/>
+          <c:max val="80"/>
           <c:min val="0"/>
         </c:scaling>
         <c:delete val="0"/>
@@ -972,6 +973,94 @@
             <a:fld id="{F7021451-1387-4CA6-816F-3879F97B5CBC}" type="slidenum">
               <a:rPr lang="en-US"/>
               <a:t>11</a:t>
+            </a:fld>
+            <a:endParaRPr lang="en-US"/>
+          </a:p>
+        </p:txBody>
+      </p:sp>
+    </p:spTree>
+    <p:extLst>
+      <p:ext uri="{BB962C8B-B14F-4D97-AF65-F5344CB8AC3E}">
+        <p14:creationId xmlns:p14="http://schemas.microsoft.com/office/powerpoint/2010/main" val="1024086991"/>
+      </p:ext>
+    </p:extLst>
+  </p:cSld>
+  <p:clrMapOvr>
+    <a:masterClrMapping/>
+  </p:clrMapOvr>
+</p:notes>
+</file>
+
+<file path=ppt/notesSlides/notesSlide12.xml><?xml version="1.0" encoding="utf-8"?>
+<p:notes xmlns:a="http://schemas.openxmlformats.org/drawingml/2006/main" xmlns:r="http://schemas.openxmlformats.org/officeDocument/2006/relationships" xmlns:p="http://schemas.openxmlformats.org/presentationml/2006/main">
+  <p:cSld>
+    <p:spTree>
+      <p:nvGrpSpPr>
+        <p:cNvPr id="1" name=""/>
+        <p:cNvGrpSpPr/>
+        <p:nvPr/>
+      </p:nvGrpSpPr>
+      <p:grpSpPr>
+        <a:xfrm>
+          <a:off x="0" y="0"/>
+          <a:ext cx="0" cy="0"/>
+          <a:chOff x="0" y="0"/>
+          <a:chExt cx="0" cy="0"/>
+        </a:xfrm>
+      </p:grpSpPr>
+      <p:sp>
+        <p:nvSpPr>
+          <p:cNvPr id="2" name="Slide Image Placeholder 1"/>
+          <p:cNvSpPr>
+            <a:spLocks noGrp="1" noRot="1" noChangeAspect="1"/>
+          </p:cNvSpPr>
+          <p:nvPr>
+            <p:ph type="sldImg"/>
+          </p:nvPr>
+        </p:nvSpPr>
+        <p:spPr/>
+      </p:sp>
+      <p:sp>
+        <p:nvSpPr>
+          <p:cNvPr id="3" name="Notes Placeholder 2"/>
+          <p:cNvSpPr>
+            <a:spLocks noGrp="1"/>
+          </p:cNvSpPr>
+          <p:nvPr>
+            <p:ph type="body" idx="1"/>
+          </p:nvPr>
+        </p:nvSpPr>
+        <p:spPr/>
+        <p:txBody>
+          <a:bodyPr/>
+          <a:lstStyle/>
+          <a:p>
+            <a:r>
+              <a:rPr lang="en-US" dirty="0"/>
+              <a:t/>
+            </a:r>
+            <a:endParaRPr lang="en-US" dirty="0"/>
+          </a:p>
+        </p:txBody>
+      </p:sp>
+      <p:sp>
+        <p:nvSpPr>
+          <p:cNvPr id="4" name="Slide Number Placeholder 3"/>
+          <p:cNvSpPr>
+            <a:spLocks noGrp="1"/>
+          </p:cNvSpPr>
+          <p:nvPr>
+            <p:ph type="sldNum" sz="quarter" idx="10"/>
+          </p:nvPr>
+        </p:nvSpPr>
+        <p:spPr/>
+        <p:txBody>
+          <a:bodyPr/>
+          <a:lstStyle/>
+          <a:p>
+            <a:fld id="{F7021451-1387-4CA6-816F-3879F97B5CBC}" type="slidenum">
+              <a:rPr lang="en-US"/>
+              <a:t>12</a:t>
             </a:fld>
             <a:endParaRPr lang="en-US"/>
           </a:p>
@@ -2133,7 +2222,7 @@
         <p:spPr>
           <a:xfrm>
             <a:off x="658368" y="2148840"/>
-            <a:ext cx="7315200" cy="274320"/>
+            <a:ext cx="8229600" cy="274320"/>
           </a:xfrm>
           <a:prstGeom prst="rect">
             <a:avLst/>
@@ -2171,8 +2260,8 @@
         </p:nvSpPr>
         <p:spPr>
           <a:xfrm>
-            <a:off x="640080" y="2514600"/>
-            <a:ext cx="8412480" cy="1737360"/>
+            <a:off x="640080" y="2468880"/>
+            <a:ext cx="8412480" cy="1554480"/>
           </a:xfrm>
           <a:prstGeom prst="rect">
             <a:avLst/>
@@ -2199,7 +2288,7 @@
                 <a:ea typeface="Arial" pitchFamily="34" charset="-122"/>
                 <a:cs typeface="Arial" pitchFamily="34" charset="-120"/>
               </a:rPr>
-              <a:t>Toekomstvast laadplan</a:t>
+              <a:t>Meer EV in</a:t>
             </a:r>
             <a:endParaRPr lang="en-US" sz="4600" dirty="0"/>
           </a:p>
@@ -2219,7 +2308,7 @@
                 <a:ea typeface="Arial" pitchFamily="34" charset="-122"/>
                 <a:cs typeface="Arial" pitchFamily="34" charset="-120"/>
               </a:rPr>
-              <a:t>voor gemeenten</a:t>
+              <a:t>Lommel</a:t>
             </a:r>
             <a:endParaRPr lang="en-US" sz="4600" dirty="0"/>
           </a:p>
@@ -2233,24 +2322,27 @@
         </p:nvSpPr>
         <p:spPr>
           <a:xfrm>
-            <a:off x="658368" y="4343400"/>
-            <a:ext cx="8229600" cy="640080"/>
-          </a:xfrm>
-          <a:prstGeom prst="rect">
-            <a:avLst/>
-          </a:prstGeom>
-          <a:noFill/>
-          <a:ln/>
-        </p:spPr>
-        <p:txBody>
-          <a:bodyPr wrap="square" lIns="0" tIns="0" rIns="0" bIns="0" rtlCol="0" anchor="ctr"/>
-          <a:lstStyle/>
-          <a:p>
-            <a:pPr indent="0" marL="0">
-              <a:buNone/>
-            </a:pPr>
-            <a:r>
-              <a:rPr lang="en-US" sz="1600" dirty="0">
+            <a:off x="4572000" y="3246120"/>
+            <a:ext cx="7132320" cy="1371600"/>
+          </a:xfrm>
+          <a:prstGeom prst="rect">
+            <a:avLst/>
+          </a:prstGeom>
+          <a:noFill/>
+          <a:ln/>
+        </p:spPr>
+        <p:txBody>
+          <a:bodyPr wrap="square" lIns="0" tIns="0" rIns="0" bIns="0" rtlCol="0" anchor="ctr"/>
+          <a:lstStyle/>
+          <a:p>
+            <a:pPr indent="0" marL="0">
+              <a:lnSpc>
+                <a:spcPct val="145000"/>
+              </a:lnSpc>
+              <a:buNone/>
+            </a:pPr>
+            <a:r>
+              <a:rPr lang="en-US" sz="1800" dirty="0">
                 <a:solidFill>
                   <a:srgbClr val="C9D6EC"/>
                 </a:solidFill>
@@ -2258,9 +2350,49 @@
                 <a:ea typeface="Arial" pitchFamily="34" charset="-122"/>
                 <a:cs typeface="Arial" pitchFamily="34" charset="-120"/>
               </a:rPr>
-              <a:t>Meer laden, lagere netkosten, sterker net — uitgewerkt voor de gemeente Lommel.</a:t>
-            </a:r>
-            <a:endParaRPr lang="en-US" sz="1600" dirty="0"/>
+              <a:t>1. Kilometer kost gedeeld door 4</a:t>
+            </a:r>
+            <a:endParaRPr lang="en-US" sz="1800" dirty="0"/>
+          </a:p>
+          <a:p>
+            <a:pPr indent="0" marL="0">
+              <a:lnSpc>
+                <a:spcPct val="145000"/>
+              </a:lnSpc>
+              <a:buNone/>
+            </a:pPr>
+            <a:r>
+              <a:rPr lang="en-US" sz="1800" dirty="0">
+                <a:solidFill>
+                  <a:srgbClr val="C9D6EC"/>
+                </a:solidFill>
+                <a:latin typeface="Arial" pitchFamily="34" charset="0"/>
+                <a:ea typeface="Arial" pitchFamily="34" charset="-122"/>
+                <a:cs typeface="Arial" pitchFamily="34" charset="-120"/>
+              </a:rPr>
+              <a:t>2. Congestie voorkomen</a:t>
+            </a:r>
+            <a:endParaRPr lang="en-US" sz="1800" dirty="0"/>
+          </a:p>
+          <a:p>
+            <a:pPr indent="0" marL="0">
+              <a:lnSpc>
+                <a:spcPct val="145000"/>
+              </a:lnSpc>
+              <a:buNone/>
+            </a:pPr>
+            <a:r>
+              <a:rPr lang="en-US" sz="1800" dirty="0">
+                <a:solidFill>
+                  <a:srgbClr val="C9D6EC"/>
+                </a:solidFill>
+                <a:latin typeface="Arial" pitchFamily="34" charset="0"/>
+                <a:ea typeface="Arial" pitchFamily="34" charset="-122"/>
+                <a:cs typeface="Arial" pitchFamily="34" charset="-120"/>
+              </a:rPr>
+              <a:t>3. Lokale energie voor lokale EV</a:t>
+            </a:r>
+            <a:endParaRPr lang="en-US" sz="1800" dirty="0"/>
           </a:p>
         </p:txBody>
       </p:sp>
@@ -2272,7 +2404,7 @@
         </p:nvSpPr>
         <p:spPr>
           <a:xfrm>
-            <a:off x="658368" y="5257800"/>
+            <a:off x="658368" y="5440680"/>
             <a:ext cx="457200" cy="457200"/>
           </a:xfrm>
           <a:prstGeom prst="ellipse">
@@ -2300,7 +2432,7 @@
         </p:blipFill>
         <p:spPr>
           <a:xfrm>
-            <a:off x="777240" y="5376672"/>
+            <a:off x="777240" y="5559552"/>
             <a:ext cx="219456" cy="219456"/>
           </a:xfrm>
           <a:prstGeom prst="rect">
@@ -2316,7 +2448,7 @@
         </p:nvSpPr>
         <p:spPr>
           <a:xfrm>
-            <a:off x="1280160" y="5321808"/>
+            <a:off x="1280160" y="5504688"/>
             <a:ext cx="6400800" cy="365760"/>
           </a:xfrm>
           <a:prstGeom prst="rect">
@@ -2388,7 +2520,7 @@
         <p:spPr>
           <a:xfrm>
             <a:off x="640080" y="548640"/>
-            <a:ext cx="7315200" cy="274320"/>
+            <a:ext cx="8229600" cy="274320"/>
           </a:xfrm>
           <a:prstGeom prst="rect">
             <a:avLst/>
@@ -3130,23 +3262,42 @@
       </p:grpSpPr>
       <p:sp>
         <p:nvSpPr>
-          <p:cNvPr id="2" name="Shape 0"/>
-          <p:cNvSpPr/>
-          <p:nvPr/>
-        </p:nvSpPr>
-        <p:spPr>
-          <a:xfrm>
-            <a:off x="-1828800" y="3657600"/>
-            <a:ext cx="5943600" cy="5943600"/>
-          </a:xfrm>
-          <a:prstGeom prst="ellipse">
-            <a:avLst/>
-          </a:prstGeom>
-          <a:solidFill>
-            <a:srgbClr val="27406F"/>
-          </a:solidFill>
-          <a:ln/>
-        </p:spPr>
+          <p:cNvPr id="2" name="Text 0"/>
+          <p:cNvSpPr/>
+          <p:nvPr/>
+        </p:nvSpPr>
+        <p:spPr>
+          <a:xfrm>
+            <a:off x="640080" y="548640"/>
+            <a:ext cx="8229600" cy="274320"/>
+          </a:xfrm>
+          <a:prstGeom prst="rect">
+            <a:avLst/>
+          </a:prstGeom>
+          <a:noFill/>
+          <a:ln/>
+        </p:spPr>
+        <p:txBody>
+          <a:bodyPr wrap="square" lIns="0" tIns="0" rIns="0" bIns="0" rtlCol="0" anchor="ctr"/>
+          <a:lstStyle/>
+          <a:p>
+            <a:pPr indent="0" marL="0">
+              <a:buNone/>
+            </a:pPr>
+            <a:r>
+              <a:rPr lang="en-US" sz="1200" b="1" spc="300" kern="0" dirty="0">
+                <a:solidFill>
+                  <a:srgbClr val="05B050"/>
+                </a:solidFill>
+                <a:latin typeface="Arial" pitchFamily="34" charset="0"/>
+                <a:ea typeface="Arial" pitchFamily="34" charset="-122"/>
+                <a:cs typeface="Arial" pitchFamily="34" charset="-120"/>
+              </a:rPr>
+              <a:t>SAMENVATTING</a:t>
+            </a:r>
+            <a:endParaRPr lang="en-US" sz="1200" dirty="0"/>
+          </a:p>
+        </p:txBody>
       </p:sp>
       <p:sp>
         <p:nvSpPr>
@@ -3156,63 +3307,27 @@
         </p:nvSpPr>
         <p:spPr>
           <a:xfrm>
-            <a:off x="640080" y="548640"/>
-            <a:ext cx="7315200" cy="274320"/>
-          </a:xfrm>
-          <a:prstGeom prst="rect">
-            <a:avLst/>
-          </a:prstGeom>
-          <a:noFill/>
-          <a:ln/>
-        </p:spPr>
-        <p:txBody>
-          <a:bodyPr wrap="square" lIns="0" tIns="0" rIns="0" bIns="0" rtlCol="0" anchor="ctr"/>
-          <a:lstStyle/>
-          <a:p>
-            <a:pPr indent="0" marL="0">
-              <a:buNone/>
-            </a:pPr>
-            <a:r>
-              <a:rPr lang="en-US" sz="1200" b="1" spc="300" kern="0" dirty="0">
-                <a:solidFill>
-                  <a:srgbClr val="05B050"/>
-                </a:solidFill>
-                <a:latin typeface="Arial" pitchFamily="34" charset="0"/>
-                <a:ea typeface="Arial" pitchFamily="34" charset="-122"/>
-                <a:cs typeface="Arial" pitchFamily="34" charset="-120"/>
-              </a:rPr>
-              <a:t>VOLGENDE STAP</a:t>
-            </a:r>
-            <a:endParaRPr lang="en-US" sz="1200" dirty="0"/>
-          </a:p>
-        </p:txBody>
-      </p:sp>
-      <p:sp>
-        <p:nvSpPr>
-          <p:cNvPr id="4" name="Text 2"/>
-          <p:cNvSpPr/>
-          <p:nvPr/>
-        </p:nvSpPr>
-        <p:spPr>
-          <a:xfrm>
-            <a:off x="640080" y="914400"/>
-            <a:ext cx="10972800" cy="914400"/>
-          </a:xfrm>
-          <a:prstGeom prst="rect">
-            <a:avLst/>
-          </a:prstGeom>
-          <a:noFill/>
-          <a:ln/>
-        </p:spPr>
-        <p:txBody>
-          <a:bodyPr wrap="square" lIns="0" tIns="0" rIns="0" bIns="0" rtlCol="0" anchor="ctr"/>
-          <a:lstStyle/>
-          <a:p>
-            <a:pPr indent="0" marL="0">
-              <a:buNone/>
-            </a:pPr>
-            <a:r>
-              <a:rPr lang="en-US" sz="3400" b="1" dirty="0">
+            <a:off x="640080" y="868680"/>
+            <a:ext cx="11064240" cy="822960"/>
+          </a:xfrm>
+          <a:prstGeom prst="rect">
+            <a:avLst/>
+          </a:prstGeom>
+          <a:noFill/>
+          <a:ln/>
+        </p:spPr>
+        <p:txBody>
+          <a:bodyPr wrap="square" lIns="0" tIns="0" rIns="0" bIns="0" rtlCol="0" anchor="ctr"/>
+          <a:lstStyle/>
+          <a:p>
+            <a:pPr indent="0" marL="0">
+              <a:lnSpc>
+                <a:spcPct val="95000"/>
+              </a:lnSpc>
+              <a:buNone/>
+            </a:pPr>
+            <a:r>
+              <a:rPr lang="en-US" sz="3000" b="1" dirty="0">
                 <a:solidFill>
                   <a:srgbClr val="FFFFFF"/>
                 </a:solidFill>
@@ -3220,71 +3335,37 @@
                 <a:ea typeface="Arial" pitchFamily="34" charset="-122"/>
                 <a:cs typeface="Arial" pitchFamily="34" charset="-120"/>
               </a:rPr>
-              <a:t>Werkvergadering met de aankoopcentrale</a:t>
-            </a:r>
-            <a:endParaRPr lang="en-US" sz="3400" dirty="0"/>
-          </a:p>
-        </p:txBody>
-      </p:sp>
-      <p:sp>
-        <p:nvSpPr>
-          <p:cNvPr id="5" name="Text 3"/>
-          <p:cNvSpPr/>
-          <p:nvPr/>
-        </p:nvSpPr>
-        <p:spPr>
-          <a:xfrm>
-            <a:off x="640080" y="1874520"/>
-            <a:ext cx="10972800" cy="457200"/>
-          </a:xfrm>
-          <a:prstGeom prst="rect">
-            <a:avLst/>
-          </a:prstGeom>
-          <a:noFill/>
-          <a:ln/>
-        </p:spPr>
-        <p:txBody>
-          <a:bodyPr wrap="square" lIns="0" tIns="0" rIns="0" bIns="0" rtlCol="0" anchor="ctr"/>
-          <a:lstStyle/>
-          <a:p>
-            <a:pPr indent="0" marL="0">
-              <a:buNone/>
-            </a:pPr>
-            <a:r>
-              <a:rPr lang="en-US" sz="1600" dirty="0">
-                <a:solidFill>
-                  <a:srgbClr val="C9D6EC"/>
-                </a:solidFill>
-                <a:latin typeface="Arial" pitchFamily="34" charset="0"/>
-                <a:ea typeface="Arial" pitchFamily="34" charset="-122"/>
-                <a:cs typeface="Arial" pitchFamily="34" charset="-120"/>
-              </a:rPr>
-              <a:t>Insourcing van slim laden als een service, langs twee sporen:</a:t>
-            </a:r>
-            <a:endParaRPr lang="en-US" sz="1600" dirty="0"/>
-          </a:p>
-        </p:txBody>
-      </p:sp>
-      <p:sp>
-        <p:nvSpPr>
-          <p:cNvPr id="6" name="Shape 4"/>
-          <p:cNvSpPr/>
-          <p:nvPr/>
-        </p:nvSpPr>
-        <p:spPr>
-          <a:xfrm>
-            <a:off x="640080" y="2560320"/>
-            <a:ext cx="5394960" cy="1965960"/>
+              <a:t>Wat hebben we vandaag geleerd?</a:t>
+            </a:r>
+            <a:endParaRPr lang="en-US" sz="3000" dirty="0"/>
+          </a:p>
+        </p:txBody>
+      </p:sp>
+      <p:sp>
+        <p:nvSpPr>
+          <p:cNvPr id="4" name="Shape 2"/>
+          <p:cNvSpPr/>
+          <p:nvPr/>
+        </p:nvSpPr>
+        <p:spPr>
+          <a:xfrm>
+            <a:off x="320040" y="2103120"/>
+            <a:ext cx="3611880" cy="3291840"/>
           </a:xfrm>
           <a:prstGeom prst="roundRect">
             <a:avLst>
-              <a:gd name="adj" fmla="val 4651"/>
+              <a:gd name="adj" fmla="val 2778"/>
             </a:avLst>
           </a:prstGeom>
           <a:solidFill>
             <a:srgbClr val="FFFFFF"/>
           </a:solidFill>
-          <a:ln/>
+          <a:ln w="12700">
+            <a:solidFill>
+              <a:srgbClr val="DDE3EA"/>
+            </a:solidFill>
+            <a:prstDash val="solid"/>
+          </a:ln>
           <a:effectLst>
             <a:outerShdw sx="100000" sy="100000" kx="0" ky="0" algn="bl" rotWithShape="0" blurRad="114300" dist="38100" dir="5400000">
               <a:srgbClr val="000000">
@@ -3296,14 +3377,14 @@
       </p:sp>
       <p:sp>
         <p:nvSpPr>
-          <p:cNvPr id="7" name="Shape 5"/>
-          <p:cNvSpPr/>
-          <p:nvPr/>
-        </p:nvSpPr>
-        <p:spPr>
-          <a:xfrm>
-            <a:off x="914400" y="2834640"/>
-            <a:ext cx="640080" cy="640080"/>
+          <p:cNvPr id="5" name="Shape 3"/>
+          <p:cNvSpPr/>
+          <p:nvPr/>
+        </p:nvSpPr>
+        <p:spPr>
+          <a:xfrm>
+            <a:off x="612648" y="2395728"/>
+            <a:ext cx="777240" cy="777240"/>
           </a:xfrm>
           <a:prstGeom prst="ellipse">
             <a:avLst/>
@@ -3316,7 +3397,7 @@
       </p:sp>
       <p:pic>
         <p:nvPicPr>
-          <p:cNvPr id="8" name="Image 0" descr="preencoded.png">    </p:cNvPr>
+          <p:cNvPr id="6" name="Image 0" descr="preencoded.png">    </p:cNvPr>
           <p:cNvPicPr>
             <a:picLocks noChangeAspect="1"/>
           </p:cNvPicPr>
@@ -3330,40 +3411,67 @@
         </p:blipFill>
         <p:spPr>
           <a:xfrm>
-            <a:off x="1080821" y="3001061"/>
-            <a:ext cx="307238" cy="307238"/>
+            <a:off x="814730" y="2597810"/>
+            <a:ext cx="373075" cy="373075"/>
           </a:xfrm>
           <a:prstGeom prst="rect">
             <a:avLst/>
           </a:prstGeom>
         </p:spPr>
       </p:pic>
-      <p:sp>
-        <p:nvSpPr>
-          <p:cNvPr id="9" name="Text 6"/>
-          <p:cNvSpPr/>
-          <p:nvPr/>
-        </p:nvSpPr>
-        <p:spPr>
-          <a:xfrm>
-            <a:off x="1737360" y="2880360"/>
-            <a:ext cx="4114800" cy="457200"/>
-          </a:xfrm>
-          <a:prstGeom prst="rect">
-            <a:avLst/>
-          </a:prstGeom>
-          <a:noFill/>
-          <a:ln/>
-        </p:spPr>
-        <p:txBody>
-          <a:bodyPr wrap="square" lIns="0" tIns="0" rIns="0" bIns="0" rtlCol="0" anchor="ctr"/>
-          <a:lstStyle/>
-          <a:p>
-            <a:pPr indent="0" marL="0">
-              <a:buNone/>
-            </a:pPr>
-            <a:r>
-              <a:rPr lang="en-US" sz="1600" b="1" dirty="0">
+      <p:pic>
+        <p:nvPicPr>
+          <p:cNvPr id="7" name="Image 1" descr="preencoded.png">    </p:cNvPr>
+          <p:cNvPicPr>
+            <a:picLocks noChangeAspect="1"/>
+          </p:cNvPicPr>
+          <p:nvPr/>
+        </p:nvPicPr>
+        <p:blipFill>
+          <a:blip r:embed="rId2"/>
+          <a:stretch>
+            <a:fillRect/>
+          </a:stretch>
+        </p:blipFill>
+        <p:spPr>
+          <a:xfrm>
+            <a:off x="2816352" y="2286000"/>
+            <a:ext cx="914400" cy="914400"/>
+          </a:xfrm>
+          <a:prstGeom prst="rect">
+            <a:avLst/>
+          </a:prstGeom>
+        </p:spPr>
+      </p:pic>
+      <p:sp>
+        <p:nvSpPr>
+          <p:cNvPr id="8" name="Text 4"/>
+          <p:cNvSpPr/>
+          <p:nvPr/>
+        </p:nvSpPr>
+        <p:spPr>
+          <a:xfrm>
+            <a:off x="612648" y="3429000"/>
+            <a:ext cx="3063240" cy="731520"/>
+          </a:xfrm>
+          <a:prstGeom prst="rect">
+            <a:avLst/>
+          </a:prstGeom>
+          <a:noFill/>
+          <a:ln/>
+        </p:spPr>
+        <p:txBody>
+          <a:bodyPr wrap="square" lIns="0" tIns="0" rIns="0" bIns="0" rtlCol="0" anchor="ctr"/>
+          <a:lstStyle/>
+          <a:p>
+            <a:pPr indent="0" marL="0">
+              <a:lnSpc>
+                <a:spcPct val="98000"/>
+              </a:lnSpc>
+              <a:buNone/>
+            </a:pPr>
+            <a:r>
+              <a:rPr lang="en-US" sz="1900" b="1" dirty="0">
                 <a:solidFill>
                   <a:srgbClr val="1F3864"/>
                 </a:solidFill>
@@ -3371,22 +3479,22 @@
                 <a:ea typeface="Arial" pitchFamily="34" charset="-122"/>
                 <a:cs typeface="Arial" pitchFamily="34" charset="-120"/>
               </a:rPr>
-              <a:t>1 · Communicatieplan Lommel</a:t>
-            </a:r>
-            <a:endParaRPr lang="en-US" sz="1600" dirty="0"/>
-          </a:p>
-        </p:txBody>
-      </p:sp>
-      <p:sp>
-        <p:nvSpPr>
-          <p:cNvPr id="10" name="Text 7"/>
-          <p:cNvSpPr/>
-          <p:nvPr/>
-        </p:nvSpPr>
-        <p:spPr>
-          <a:xfrm>
-            <a:off x="914400" y="3611880"/>
-            <a:ext cx="4937760" cy="777240"/>
+              <a:t>Drastisch lagere km-kost</a:t>
+            </a:r>
+            <a:endParaRPr lang="en-US" sz="1900" dirty="0"/>
+          </a:p>
+        </p:txBody>
+      </p:sp>
+      <p:sp>
+        <p:nvSpPr>
+          <p:cNvPr id="9" name="Text 5"/>
+          <p:cNvSpPr/>
+          <p:nvPr/>
+        </p:nvSpPr>
+        <p:spPr>
+          <a:xfrm>
+            <a:off x="612648" y="4206240"/>
+            <a:ext cx="3063240" cy="1051560"/>
           </a:xfrm>
           <a:prstGeom prst="rect">
             <a:avLst/>
@@ -3400,12 +3508,12 @@
           <a:p>
             <a:pPr indent="0" marL="0">
               <a:lnSpc>
-                <a:spcPct val="105000"/>
+                <a:spcPct val="108000"/>
               </a:lnSpc>
               <a:buNone/>
             </a:pPr>
             <a:r>
-              <a:rPr lang="en-US" sz="1300" dirty="0">
+              <a:rPr lang="en-US" sz="1350" dirty="0">
                 <a:solidFill>
                   <a:srgbClr val="5A6473"/>
                 </a:solidFill>
@@ -3413,32 +3521,37 @@
                 <a:ea typeface="Arial" pitchFamily="34" charset="-122"/>
                 <a:cs typeface="Arial" pitchFamily="34" charset="-120"/>
               </a:rPr>
-              <a:t>Samen met de gemeente het verhaal naar bedrijven en inwoners brengen.</a:t>
-            </a:r>
-            <a:endParaRPr lang="en-US" sz="1300" dirty="0"/>
-          </a:p>
-        </p:txBody>
-      </p:sp>
-      <p:sp>
-        <p:nvSpPr>
-          <p:cNvPr id="11" name="Shape 8"/>
-          <p:cNvSpPr/>
-          <p:nvPr/>
-        </p:nvSpPr>
-        <p:spPr>
-          <a:xfrm>
-            <a:off x="6153912" y="2560320"/>
-            <a:ext cx="5394960" cy="1965960"/>
+              <a:t>Slim laden verlaagt de kost per kilometer in Lommel drastisch.</a:t>
+            </a:r>
+            <a:endParaRPr lang="en-US" sz="1350" dirty="0"/>
+          </a:p>
+        </p:txBody>
+      </p:sp>
+      <p:sp>
+        <p:nvSpPr>
+          <p:cNvPr id="10" name="Shape 6"/>
+          <p:cNvSpPr/>
+          <p:nvPr/>
+        </p:nvSpPr>
+        <p:spPr>
+          <a:xfrm>
+            <a:off x="4288536" y="2103120"/>
+            <a:ext cx="3611880" cy="3291840"/>
           </a:xfrm>
           <a:prstGeom prst="roundRect">
             <a:avLst>
-              <a:gd name="adj" fmla="val 4651"/>
+              <a:gd name="adj" fmla="val 2778"/>
             </a:avLst>
           </a:prstGeom>
           <a:solidFill>
             <a:srgbClr val="FFFFFF"/>
           </a:solidFill>
-          <a:ln/>
+          <a:ln w="12700">
+            <a:solidFill>
+              <a:srgbClr val="DDE3EA"/>
+            </a:solidFill>
+            <a:prstDash val="solid"/>
+          </a:ln>
           <a:effectLst>
             <a:outerShdw sx="100000" sy="100000" kx="0" ky="0" algn="bl" rotWithShape="0" blurRad="114300" dist="38100" dir="5400000">
               <a:srgbClr val="000000">
@@ -3450,6 +3563,827 @@
       </p:sp>
       <p:sp>
         <p:nvSpPr>
+          <p:cNvPr id="11" name="Shape 7"/>
+          <p:cNvSpPr/>
+          <p:nvPr/>
+        </p:nvSpPr>
+        <p:spPr>
+          <a:xfrm>
+            <a:off x="4581144" y="2395728"/>
+            <a:ext cx="777240" cy="777240"/>
+          </a:xfrm>
+          <a:prstGeom prst="ellipse">
+            <a:avLst/>
+          </a:prstGeom>
+          <a:solidFill>
+            <a:srgbClr val="E7F6EC"/>
+          </a:solidFill>
+          <a:ln/>
+        </p:spPr>
+      </p:sp>
+      <p:pic>
+        <p:nvPicPr>
+          <p:cNvPr id="12" name="Image 2" descr="preencoded.png">    </p:cNvPr>
+          <p:cNvPicPr>
+            <a:picLocks noChangeAspect="1"/>
+          </p:cNvPicPr>
+          <p:nvPr/>
+        </p:nvPicPr>
+        <p:blipFill>
+          <a:blip r:embed="rId3"/>
+          <a:stretch>
+            <a:fillRect/>
+          </a:stretch>
+        </p:blipFill>
+        <p:spPr>
+          <a:xfrm>
+            <a:off x="4783226" y="2597810"/>
+            <a:ext cx="373075" cy="373075"/>
+          </a:xfrm>
+          <a:prstGeom prst="rect">
+            <a:avLst/>
+          </a:prstGeom>
+        </p:spPr>
+      </p:pic>
+      <p:pic>
+        <p:nvPicPr>
+          <p:cNvPr id="13" name="Image 3" descr="preencoded.png">    </p:cNvPr>
+          <p:cNvPicPr>
+            <a:picLocks noChangeAspect="1"/>
+          </p:cNvPicPr>
+          <p:nvPr/>
+        </p:nvPicPr>
+        <p:blipFill>
+          <a:blip r:embed="rId4"/>
+          <a:stretch>
+            <a:fillRect/>
+          </a:stretch>
+        </p:blipFill>
+        <p:spPr>
+          <a:xfrm>
+            <a:off x="6784848" y="2286000"/>
+            <a:ext cx="914400" cy="914400"/>
+          </a:xfrm>
+          <a:prstGeom prst="rect">
+            <a:avLst/>
+          </a:prstGeom>
+        </p:spPr>
+      </p:pic>
+      <p:sp>
+        <p:nvSpPr>
+          <p:cNvPr id="14" name="Text 8"/>
+          <p:cNvSpPr/>
+          <p:nvPr/>
+        </p:nvSpPr>
+        <p:spPr>
+          <a:xfrm>
+            <a:off x="4581144" y="3429000"/>
+            <a:ext cx="3063240" cy="731520"/>
+          </a:xfrm>
+          <a:prstGeom prst="rect">
+            <a:avLst/>
+          </a:prstGeom>
+          <a:noFill/>
+          <a:ln/>
+        </p:spPr>
+        <p:txBody>
+          <a:bodyPr wrap="square" lIns="0" tIns="0" rIns="0" bIns="0" rtlCol="0" anchor="ctr"/>
+          <a:lstStyle/>
+          <a:p>
+            <a:pPr indent="0" marL="0">
+              <a:lnSpc>
+                <a:spcPct val="98000"/>
+              </a:lnSpc>
+              <a:buNone/>
+            </a:pPr>
+            <a:r>
+              <a:rPr lang="en-US" sz="1900" b="1" dirty="0">
+                <a:solidFill>
+                  <a:srgbClr val="05B050"/>
+                </a:solidFill>
+                <a:latin typeface="Arial" pitchFamily="34" charset="0"/>
+                <a:ea typeface="Arial" pitchFamily="34" charset="-122"/>
+                <a:cs typeface="Arial" pitchFamily="34" charset="-120"/>
+              </a:rPr>
+              <a:t>Congestie voorkomen</a:t>
+            </a:r>
+            <a:endParaRPr lang="en-US" sz="1900" dirty="0"/>
+          </a:p>
+        </p:txBody>
+      </p:sp>
+      <p:sp>
+        <p:nvSpPr>
+          <p:cNvPr id="15" name="Text 9"/>
+          <p:cNvSpPr/>
+          <p:nvPr/>
+        </p:nvSpPr>
+        <p:spPr>
+          <a:xfrm>
+            <a:off x="4581144" y="4206240"/>
+            <a:ext cx="3063240" cy="1051560"/>
+          </a:xfrm>
+          <a:prstGeom prst="rect">
+            <a:avLst/>
+          </a:prstGeom>
+          <a:noFill/>
+          <a:ln/>
+        </p:spPr>
+        <p:txBody>
+          <a:bodyPr wrap="square" lIns="0" tIns="0" rIns="0" bIns="0" rtlCol="0" anchor="ctr"/>
+          <a:lstStyle/>
+          <a:p>
+            <a:pPr indent="0" marL="0">
+              <a:lnSpc>
+                <a:spcPct val="108000"/>
+              </a:lnSpc>
+              <a:buNone/>
+            </a:pPr>
+            <a:r>
+              <a:rPr lang="en-US" sz="1350" b="1" dirty="0">
+                <a:solidFill>
+                  <a:srgbClr val="05B050"/>
+                </a:solidFill>
+                <a:latin typeface="Arial" pitchFamily="34" charset="0"/>
+                <a:ea typeface="Arial" pitchFamily="34" charset="-122"/>
+                <a:cs typeface="Arial" pitchFamily="34" charset="-120"/>
+              </a:rPr>
+              <a:t>+91% meer energie</a:t>
+            </a:r>
+            <a:pPr indent="0" marL="0">
+              <a:lnSpc>
+                <a:spcPct val="108000"/>
+              </a:lnSpc>
+              <a:buNone/>
+            </a:pPr>
+            <a:r>
+              <a:rPr lang="en-US" sz="1350" dirty="0">
+                <a:solidFill>
+                  <a:srgbClr val="5A6473"/>
+                </a:solidFill>
+                <a:latin typeface="Arial" pitchFamily="34" charset="0"/>
+                <a:ea typeface="Arial" pitchFamily="34" charset="-122"/>
+                <a:cs typeface="Arial" pitchFamily="34" charset="-120"/>
+              </a:rPr>
+              <a:t> zonder uitbreiding van het net.</a:t>
+            </a:r>
+            <a:endParaRPr lang="en-US" sz="1350" dirty="0"/>
+          </a:p>
+        </p:txBody>
+      </p:sp>
+      <p:sp>
+        <p:nvSpPr>
+          <p:cNvPr id="16" name="Shape 10"/>
+          <p:cNvSpPr/>
+          <p:nvPr/>
+        </p:nvSpPr>
+        <p:spPr>
+          <a:xfrm>
+            <a:off x="8257032" y="2103120"/>
+            <a:ext cx="3611880" cy="3291840"/>
+          </a:xfrm>
+          <a:prstGeom prst="roundRect">
+            <a:avLst>
+              <a:gd name="adj" fmla="val 2778"/>
+            </a:avLst>
+          </a:prstGeom>
+          <a:solidFill>
+            <a:srgbClr val="FFFFFF"/>
+          </a:solidFill>
+          <a:ln w="12700">
+            <a:solidFill>
+              <a:srgbClr val="DDE3EA"/>
+            </a:solidFill>
+            <a:prstDash val="solid"/>
+          </a:ln>
+          <a:effectLst>
+            <a:outerShdw sx="100000" sy="100000" kx="0" ky="0" algn="bl" rotWithShape="0" blurRad="114300" dist="38100" dir="5400000">
+              <a:srgbClr val="000000">
+                <a:alpha val="10000"/>
+              </a:srgbClr>
+            </a:outerShdw>
+          </a:effectLst>
+        </p:spPr>
+      </p:sp>
+      <p:sp>
+        <p:nvSpPr>
+          <p:cNvPr id="17" name="Shape 11"/>
+          <p:cNvSpPr/>
+          <p:nvPr/>
+        </p:nvSpPr>
+        <p:spPr>
+          <a:xfrm>
+            <a:off x="8549640" y="2395728"/>
+            <a:ext cx="777240" cy="777240"/>
+          </a:xfrm>
+          <a:prstGeom prst="ellipse">
+            <a:avLst/>
+          </a:prstGeom>
+          <a:solidFill>
+            <a:srgbClr val="F7EDE3"/>
+          </a:solidFill>
+          <a:ln/>
+        </p:spPr>
+      </p:sp>
+      <p:pic>
+        <p:nvPicPr>
+          <p:cNvPr id="18" name="Image 4" descr="preencoded.png">    </p:cNvPr>
+          <p:cNvPicPr>
+            <a:picLocks noChangeAspect="1"/>
+          </p:cNvPicPr>
+          <p:nvPr/>
+        </p:nvPicPr>
+        <p:blipFill>
+          <a:blip r:embed="rId5"/>
+          <a:stretch>
+            <a:fillRect/>
+          </a:stretch>
+        </p:blipFill>
+        <p:spPr>
+          <a:xfrm>
+            <a:off x="8751722" y="2597810"/>
+            <a:ext cx="373075" cy="373075"/>
+          </a:xfrm>
+          <a:prstGeom prst="rect">
+            <a:avLst/>
+          </a:prstGeom>
+        </p:spPr>
+      </p:pic>
+      <p:pic>
+        <p:nvPicPr>
+          <p:cNvPr id="19" name="Image 5" descr="preencoded.png">    </p:cNvPr>
+          <p:cNvPicPr>
+            <a:picLocks noChangeAspect="1"/>
+          </p:cNvPicPr>
+          <p:nvPr/>
+        </p:nvPicPr>
+        <p:blipFill>
+          <a:blip r:embed="rId6"/>
+          <a:stretch>
+            <a:fillRect/>
+          </a:stretch>
+        </p:blipFill>
+        <p:spPr>
+          <a:xfrm>
+            <a:off x="10753344" y="2286000"/>
+            <a:ext cx="914400" cy="914400"/>
+          </a:xfrm>
+          <a:prstGeom prst="rect">
+            <a:avLst/>
+          </a:prstGeom>
+        </p:spPr>
+      </p:pic>
+      <p:sp>
+        <p:nvSpPr>
+          <p:cNvPr id="20" name="Text 12"/>
+          <p:cNvSpPr/>
+          <p:nvPr/>
+        </p:nvSpPr>
+        <p:spPr>
+          <a:xfrm>
+            <a:off x="8549640" y="3429000"/>
+            <a:ext cx="3063240" cy="731520"/>
+          </a:xfrm>
+          <a:prstGeom prst="rect">
+            <a:avLst/>
+          </a:prstGeom>
+          <a:noFill/>
+          <a:ln/>
+        </p:spPr>
+        <p:txBody>
+          <a:bodyPr wrap="square" lIns="0" tIns="0" rIns="0" bIns="0" rtlCol="0" anchor="ctr"/>
+          <a:lstStyle/>
+          <a:p>
+            <a:pPr indent="0" marL="0">
+              <a:lnSpc>
+                <a:spcPct val="98000"/>
+              </a:lnSpc>
+              <a:buNone/>
+            </a:pPr>
+            <a:r>
+              <a:rPr lang="en-US" sz="1900" b="1" dirty="0">
+                <a:solidFill>
+                  <a:srgbClr val="9E480E"/>
+                </a:solidFill>
+                <a:latin typeface="Arial" pitchFamily="34" charset="0"/>
+                <a:ea typeface="Arial" pitchFamily="34" charset="-122"/>
+                <a:cs typeface="Arial" pitchFamily="34" charset="-120"/>
+              </a:rPr>
+              <a:t>Lokaal voor lokaal</a:t>
+            </a:r>
+            <a:endParaRPr lang="en-US" sz="1900" dirty="0"/>
+          </a:p>
+        </p:txBody>
+      </p:sp>
+      <p:sp>
+        <p:nvSpPr>
+          <p:cNvPr id="21" name="Text 13"/>
+          <p:cNvSpPr/>
+          <p:nvPr/>
+        </p:nvSpPr>
+        <p:spPr>
+          <a:xfrm>
+            <a:off x="8549640" y="4206240"/>
+            <a:ext cx="3063240" cy="1051560"/>
+          </a:xfrm>
+          <a:prstGeom prst="rect">
+            <a:avLst/>
+          </a:prstGeom>
+          <a:noFill/>
+          <a:ln/>
+        </p:spPr>
+        <p:txBody>
+          <a:bodyPr wrap="square" lIns="0" tIns="0" rIns="0" bIns="0" rtlCol="0" anchor="ctr"/>
+          <a:lstStyle/>
+          <a:p>
+            <a:pPr indent="0" marL="0">
+              <a:lnSpc>
+                <a:spcPct val="108000"/>
+              </a:lnSpc>
+              <a:buNone/>
+            </a:pPr>
+            <a:r>
+              <a:rPr lang="en-US" sz="1350" dirty="0">
+                <a:solidFill>
+                  <a:srgbClr val="5A6473"/>
+                </a:solidFill>
+                <a:latin typeface="Arial" pitchFamily="34" charset="0"/>
+                <a:ea typeface="Arial" pitchFamily="34" charset="-122"/>
+                <a:cs typeface="Arial" pitchFamily="34" charset="-120"/>
+              </a:rPr>
+              <a:t>Lokale injectie wordt lokaal verbruikt — eigen wind en zon voor eigen laden.</a:t>
+            </a:r>
+            <a:endParaRPr lang="en-US" sz="1350" dirty="0"/>
+          </a:p>
+        </p:txBody>
+      </p:sp>
+      <p:sp>
+        <p:nvSpPr>
+          <p:cNvPr id="22" name="Text 14"/>
+          <p:cNvSpPr/>
+          <p:nvPr/>
+        </p:nvSpPr>
+        <p:spPr>
+          <a:xfrm>
+            <a:off x="640080" y="5669280"/>
+            <a:ext cx="10972800" cy="457200"/>
+          </a:xfrm>
+          <a:prstGeom prst="rect">
+            <a:avLst/>
+          </a:prstGeom>
+          <a:noFill/>
+          <a:ln/>
+        </p:spPr>
+        <p:txBody>
+          <a:bodyPr wrap="square" lIns="0" tIns="0" rIns="0" bIns="0" rtlCol="0" anchor="ctr"/>
+          <a:lstStyle/>
+          <a:p>
+            <a:pPr indent="0" marL="0">
+              <a:buNone/>
+            </a:pPr>
+            <a:r>
+              <a:rPr lang="en-US" sz="1400" i="1" dirty="0">
+                <a:solidFill>
+                  <a:srgbClr val="C9D6EC"/>
+                </a:solidFill>
+                <a:latin typeface="Arial" pitchFamily="34" charset="0"/>
+                <a:ea typeface="Arial" pitchFamily="34" charset="-122"/>
+                <a:cs typeface="Arial" pitchFamily="34" charset="-120"/>
+              </a:rPr>
+              <a:t>Slim laden = goedkoper rijden, minder congestie én lokale energie lokaal benut.</a:t>
+            </a:r>
+            <a:endParaRPr lang="en-US" sz="1400" dirty="0"/>
+          </a:p>
+        </p:txBody>
+      </p:sp>
+      <p:sp>
+        <p:nvSpPr>
+          <p:cNvPr id="23" name="Text 15"/>
+          <p:cNvSpPr/>
+          <p:nvPr/>
+        </p:nvSpPr>
+        <p:spPr>
+          <a:xfrm>
+            <a:off x="11365992" y="6400800"/>
+            <a:ext cx="457200" cy="274320"/>
+          </a:xfrm>
+          <a:prstGeom prst="rect">
+            <a:avLst/>
+          </a:prstGeom>
+          <a:noFill/>
+          <a:ln/>
+        </p:spPr>
+        <p:txBody>
+          <a:bodyPr wrap="square" lIns="0" tIns="0" rIns="0" bIns="0" rtlCol="0" anchor="ctr"/>
+          <a:lstStyle/>
+          <a:p>
+            <a:pPr algn="r" indent="0" marL="0">
+              <a:buNone/>
+            </a:pPr>
+            <a:r>
+              <a:rPr lang="en-US" sz="1000" dirty="0">
+                <a:solidFill>
+                  <a:srgbClr val="5A6473"/>
+                </a:solidFill>
+                <a:latin typeface="Arial" pitchFamily="34" charset="0"/>
+                <a:ea typeface="Arial" pitchFamily="34" charset="-122"/>
+                <a:cs typeface="Arial" pitchFamily="34" charset="-120"/>
+              </a:rPr>
+              <a:t>11</a:t>
+            </a:r>
+            <a:endParaRPr lang="en-US" sz="1000" dirty="0"/>
+          </a:p>
+        </p:txBody>
+      </p:sp>
+      <p:sp>
+        <p:nvSpPr>
+          <p:cNvPr id="24" name="Text 16"/>
+          <p:cNvSpPr/>
+          <p:nvPr/>
+        </p:nvSpPr>
+        <p:spPr>
+          <a:xfrm>
+            <a:off x="548640" y="6400800"/>
+            <a:ext cx="1828800" cy="274320"/>
+          </a:xfrm>
+          <a:prstGeom prst="rect">
+            <a:avLst/>
+          </a:prstGeom>
+          <a:noFill/>
+          <a:ln/>
+        </p:spPr>
+        <p:txBody>
+          <a:bodyPr wrap="square" lIns="0" tIns="0" rIns="0" bIns="0" rtlCol="0" anchor="ctr"/>
+          <a:lstStyle/>
+          <a:p>
+            <a:pPr indent="0" marL="0">
+              <a:buNone/>
+            </a:pPr>
+            <a:r>
+              <a:rPr lang="en-US" sz="1000" dirty="0">
+                <a:solidFill>
+                  <a:srgbClr val="5A6473"/>
+                </a:solidFill>
+                <a:latin typeface="Arial" pitchFamily="34" charset="0"/>
+                <a:ea typeface="Arial" pitchFamily="34" charset="-122"/>
+                <a:cs typeface="Arial" pitchFamily="34" charset="-120"/>
+              </a:rPr>
+              <a:t>fluctus.net</a:t>
+            </a:r>
+            <a:endParaRPr lang="en-US" sz="1000" dirty="0"/>
+          </a:p>
+        </p:txBody>
+      </p:sp>
+    </p:spTree>
+  </p:cSld>
+  <p:clrMapOvr>
+    <a:masterClrMapping/>
+  </p:clrMapOvr>
+</p:sld>
+</file>
+
+<file path=ppt/slides/slide12.xml><?xml version="1.0" encoding="utf-8"?>
+<p:sld xmlns:a="http://schemas.openxmlformats.org/drawingml/2006/main" xmlns:r="http://schemas.openxmlformats.org/officeDocument/2006/relationships" xmlns:p="http://schemas.openxmlformats.org/presentationml/2006/main">
+  <p:cSld name="Slide 12">
+    <p:bg>
+      <p:bgPr>
+        <a:solidFill>
+          <a:srgbClr val="1F3864"/>
+        </a:solidFill>
+      </p:bgPr>
+    </p:bg>
+    <p:spTree>
+      <p:nvGrpSpPr>
+        <p:cNvPr id="1" name=""/>
+        <p:cNvGrpSpPr/>
+        <p:nvPr/>
+      </p:nvGrpSpPr>
+      <p:grpSpPr>
+        <a:xfrm>
+          <a:off x="0" y="0"/>
+          <a:ext cx="0" cy="0"/>
+          <a:chOff x="0" y="0"/>
+          <a:chExt cx="0" cy="0"/>
+        </a:xfrm>
+      </p:grpSpPr>
+      <p:sp>
+        <p:nvSpPr>
+          <p:cNvPr id="2" name="Shape 0"/>
+          <p:cNvSpPr/>
+          <p:nvPr/>
+        </p:nvSpPr>
+        <p:spPr>
+          <a:xfrm>
+            <a:off x="-1828800" y="3657600"/>
+            <a:ext cx="5943600" cy="5943600"/>
+          </a:xfrm>
+          <a:prstGeom prst="ellipse">
+            <a:avLst/>
+          </a:prstGeom>
+          <a:solidFill>
+            <a:srgbClr val="27406F"/>
+          </a:solidFill>
+          <a:ln/>
+        </p:spPr>
+      </p:sp>
+      <p:sp>
+        <p:nvSpPr>
+          <p:cNvPr id="3" name="Text 1"/>
+          <p:cNvSpPr/>
+          <p:nvPr/>
+        </p:nvSpPr>
+        <p:spPr>
+          <a:xfrm>
+            <a:off x="640080" y="548640"/>
+            <a:ext cx="8229600" cy="274320"/>
+          </a:xfrm>
+          <a:prstGeom prst="rect">
+            <a:avLst/>
+          </a:prstGeom>
+          <a:noFill/>
+          <a:ln/>
+        </p:spPr>
+        <p:txBody>
+          <a:bodyPr wrap="square" lIns="0" tIns="0" rIns="0" bIns="0" rtlCol="0" anchor="ctr"/>
+          <a:lstStyle/>
+          <a:p>
+            <a:pPr indent="0" marL="0">
+              <a:buNone/>
+            </a:pPr>
+            <a:r>
+              <a:rPr lang="en-US" sz="1200" b="1" spc="300" kern="0" dirty="0">
+                <a:solidFill>
+                  <a:srgbClr val="05B050"/>
+                </a:solidFill>
+                <a:latin typeface="Arial" pitchFamily="34" charset="0"/>
+                <a:ea typeface="Arial" pitchFamily="34" charset="-122"/>
+                <a:cs typeface="Arial" pitchFamily="34" charset="-120"/>
+              </a:rPr>
+              <a:t>VOLGENDE STAP</a:t>
+            </a:r>
+            <a:endParaRPr lang="en-US" sz="1200" dirty="0"/>
+          </a:p>
+        </p:txBody>
+      </p:sp>
+      <p:sp>
+        <p:nvSpPr>
+          <p:cNvPr id="4" name="Text 2"/>
+          <p:cNvSpPr/>
+          <p:nvPr/>
+        </p:nvSpPr>
+        <p:spPr>
+          <a:xfrm>
+            <a:off x="640080" y="914400"/>
+            <a:ext cx="10972800" cy="914400"/>
+          </a:xfrm>
+          <a:prstGeom prst="rect">
+            <a:avLst/>
+          </a:prstGeom>
+          <a:noFill/>
+          <a:ln/>
+        </p:spPr>
+        <p:txBody>
+          <a:bodyPr wrap="square" lIns="0" tIns="0" rIns="0" bIns="0" rtlCol="0" anchor="ctr"/>
+          <a:lstStyle/>
+          <a:p>
+            <a:pPr indent="0" marL="0">
+              <a:buNone/>
+            </a:pPr>
+            <a:r>
+              <a:rPr lang="en-US" sz="3400" b="1" dirty="0">
+                <a:solidFill>
+                  <a:srgbClr val="FFFFFF"/>
+                </a:solidFill>
+                <a:latin typeface="Arial" pitchFamily="34" charset="0"/>
+                <a:ea typeface="Arial" pitchFamily="34" charset="-122"/>
+                <a:cs typeface="Arial" pitchFamily="34" charset="-120"/>
+              </a:rPr>
+              <a:t>Werkvergadering met de aankoopcentrale</a:t>
+            </a:r>
+            <a:endParaRPr lang="en-US" sz="3400" dirty="0"/>
+          </a:p>
+        </p:txBody>
+      </p:sp>
+      <p:sp>
+        <p:nvSpPr>
+          <p:cNvPr id="5" name="Text 3"/>
+          <p:cNvSpPr/>
+          <p:nvPr/>
+        </p:nvSpPr>
+        <p:spPr>
+          <a:xfrm>
+            <a:off x="640080" y="1874520"/>
+            <a:ext cx="10972800" cy="457200"/>
+          </a:xfrm>
+          <a:prstGeom prst="rect">
+            <a:avLst/>
+          </a:prstGeom>
+          <a:noFill/>
+          <a:ln/>
+        </p:spPr>
+        <p:txBody>
+          <a:bodyPr wrap="square" lIns="0" tIns="0" rIns="0" bIns="0" rtlCol="0" anchor="ctr"/>
+          <a:lstStyle/>
+          <a:p>
+            <a:pPr indent="0" marL="0">
+              <a:buNone/>
+            </a:pPr>
+            <a:r>
+              <a:rPr lang="en-US" sz="1600" dirty="0">
+                <a:solidFill>
+                  <a:srgbClr val="C9D6EC"/>
+                </a:solidFill>
+                <a:latin typeface="Arial" pitchFamily="34" charset="0"/>
+                <a:ea typeface="Arial" pitchFamily="34" charset="-122"/>
+                <a:cs typeface="Arial" pitchFamily="34" charset="-120"/>
+              </a:rPr>
+              <a:t>Insourcing van slim laden als een service, langs twee sporen:</a:t>
+            </a:r>
+            <a:endParaRPr lang="en-US" sz="1600" dirty="0"/>
+          </a:p>
+        </p:txBody>
+      </p:sp>
+      <p:sp>
+        <p:nvSpPr>
+          <p:cNvPr id="6" name="Shape 4"/>
+          <p:cNvSpPr/>
+          <p:nvPr/>
+        </p:nvSpPr>
+        <p:spPr>
+          <a:xfrm>
+            <a:off x="640080" y="2560320"/>
+            <a:ext cx="5394960" cy="1965960"/>
+          </a:xfrm>
+          <a:prstGeom prst="roundRect">
+            <a:avLst>
+              <a:gd name="adj" fmla="val 4651"/>
+            </a:avLst>
+          </a:prstGeom>
+          <a:solidFill>
+            <a:srgbClr val="FFFFFF"/>
+          </a:solidFill>
+          <a:ln/>
+          <a:effectLst>
+            <a:outerShdw sx="100000" sy="100000" kx="0" ky="0" algn="bl" rotWithShape="0" blurRad="114300" dist="38100" dir="5400000">
+              <a:srgbClr val="000000">
+                <a:alpha val="10000"/>
+              </a:srgbClr>
+            </a:outerShdw>
+          </a:effectLst>
+        </p:spPr>
+      </p:sp>
+      <p:sp>
+        <p:nvSpPr>
+          <p:cNvPr id="7" name="Shape 5"/>
+          <p:cNvSpPr/>
+          <p:nvPr/>
+        </p:nvSpPr>
+        <p:spPr>
+          <a:xfrm>
+            <a:off x="914400" y="2834640"/>
+            <a:ext cx="640080" cy="640080"/>
+          </a:xfrm>
+          <a:prstGeom prst="ellipse">
+            <a:avLst/>
+          </a:prstGeom>
+          <a:solidFill>
+            <a:srgbClr val="EAF0FA"/>
+          </a:solidFill>
+          <a:ln/>
+        </p:spPr>
+      </p:sp>
+      <p:pic>
+        <p:nvPicPr>
+          <p:cNvPr id="8" name="Image 0" descr="preencoded.png">    </p:cNvPr>
+          <p:cNvPicPr>
+            <a:picLocks noChangeAspect="1"/>
+          </p:cNvPicPr>
+          <p:nvPr/>
+        </p:nvPicPr>
+        <p:blipFill>
+          <a:blip r:embed="rId1"/>
+          <a:stretch>
+            <a:fillRect/>
+          </a:stretch>
+        </p:blipFill>
+        <p:spPr>
+          <a:xfrm>
+            <a:off x="1080821" y="3001061"/>
+            <a:ext cx="307238" cy="307238"/>
+          </a:xfrm>
+          <a:prstGeom prst="rect">
+            <a:avLst/>
+          </a:prstGeom>
+        </p:spPr>
+      </p:pic>
+      <p:sp>
+        <p:nvSpPr>
+          <p:cNvPr id="9" name="Text 6"/>
+          <p:cNvSpPr/>
+          <p:nvPr/>
+        </p:nvSpPr>
+        <p:spPr>
+          <a:xfrm>
+            <a:off x="1737360" y="2880360"/>
+            <a:ext cx="4114800" cy="457200"/>
+          </a:xfrm>
+          <a:prstGeom prst="rect">
+            <a:avLst/>
+          </a:prstGeom>
+          <a:noFill/>
+          <a:ln/>
+        </p:spPr>
+        <p:txBody>
+          <a:bodyPr wrap="square" lIns="0" tIns="0" rIns="0" bIns="0" rtlCol="0" anchor="ctr"/>
+          <a:lstStyle/>
+          <a:p>
+            <a:pPr indent="0" marL="0">
+              <a:buNone/>
+            </a:pPr>
+            <a:r>
+              <a:rPr lang="en-US" sz="1600" b="1" dirty="0">
+                <a:solidFill>
+                  <a:srgbClr val="1F3864"/>
+                </a:solidFill>
+                <a:latin typeface="Arial" pitchFamily="34" charset="0"/>
+                <a:ea typeface="Arial" pitchFamily="34" charset="-122"/>
+                <a:cs typeface="Arial" pitchFamily="34" charset="-120"/>
+              </a:rPr>
+              <a:t>1 · Communicatieplan Lommel</a:t>
+            </a:r>
+            <a:endParaRPr lang="en-US" sz="1600" dirty="0"/>
+          </a:p>
+        </p:txBody>
+      </p:sp>
+      <p:sp>
+        <p:nvSpPr>
+          <p:cNvPr id="10" name="Text 7"/>
+          <p:cNvSpPr/>
+          <p:nvPr/>
+        </p:nvSpPr>
+        <p:spPr>
+          <a:xfrm>
+            <a:off x="914400" y="3611880"/>
+            <a:ext cx="4937760" cy="777240"/>
+          </a:xfrm>
+          <a:prstGeom prst="rect">
+            <a:avLst/>
+          </a:prstGeom>
+          <a:noFill/>
+          <a:ln/>
+        </p:spPr>
+        <p:txBody>
+          <a:bodyPr wrap="square" lIns="0" tIns="0" rIns="0" bIns="0" rtlCol="0" anchor="ctr"/>
+          <a:lstStyle/>
+          <a:p>
+            <a:pPr indent="0" marL="0">
+              <a:buNone/>
+            </a:pPr>
+            <a:r>
+              <a:rPr lang="en-US" sz="1300" dirty="0">
+                <a:solidFill>
+                  <a:srgbClr val="5A6473"/>
+                </a:solidFill>
+                <a:latin typeface="Arial" pitchFamily="34" charset="0"/>
+                <a:ea typeface="Arial" pitchFamily="34" charset="-122"/>
+                <a:cs typeface="Arial" pitchFamily="34" charset="-120"/>
+              </a:rPr>
+              <a:t>Samen met de gemeente het verhaal naar bedrijven en inwoners brengen.</a:t>
+            </a:r>
+            <a:endParaRPr lang="en-US" sz="1300" dirty="0"/>
+          </a:p>
+        </p:txBody>
+      </p:sp>
+      <p:sp>
+        <p:nvSpPr>
+          <p:cNvPr id="11" name="Shape 8"/>
+          <p:cNvSpPr/>
+          <p:nvPr/>
+        </p:nvSpPr>
+        <p:spPr>
+          <a:xfrm>
+            <a:off x="6153912" y="2560320"/>
+            <a:ext cx="5394960" cy="1965960"/>
+          </a:xfrm>
+          <a:prstGeom prst="roundRect">
+            <a:avLst>
+              <a:gd name="adj" fmla="val 4651"/>
+            </a:avLst>
+          </a:prstGeom>
+          <a:solidFill>
+            <a:srgbClr val="FFFFFF"/>
+          </a:solidFill>
+          <a:ln/>
+          <a:effectLst>
+            <a:outerShdw sx="100000" sy="100000" kx="0" ky="0" algn="bl" rotWithShape="0" blurRad="114300" dist="38100" dir="5400000">
+              <a:srgbClr val="000000">
+                <a:alpha val="10000"/>
+              </a:srgbClr>
+            </a:outerShdw>
+          </a:effectLst>
+        </p:spPr>
+      </p:sp>
+      <p:sp>
+        <p:nvSpPr>
           <p:cNvPr id="12" name="Shape 9"/>
           <p:cNvSpPr/>
           <p:nvPr/>
@@ -3553,9 +4487,6 @@
           <a:lstStyle/>
           <a:p>
             <a:pPr indent="0" marL="0">
-              <a:lnSpc>
-                <a:spcPct val="105000"/>
-              </a:lnSpc>
               <a:buNone/>
             </a:pPr>
             <a:r>
@@ -3750,7 +4681,7 @@
         <p:spPr>
           <a:xfrm>
             <a:off x="640080" y="548640"/>
-            <a:ext cx="7315200" cy="274320"/>
+            <a:ext cx="8229600" cy="274320"/>
           </a:xfrm>
           <a:prstGeom prst="rect">
             <a:avLst/>
@@ -4128,7 +5059,7 @@
                 <a:ea typeface="Arial" pitchFamily="34" charset="-122"/>
                 <a:cs typeface="Arial" pitchFamily="34" charset="-120"/>
               </a:rPr>
-              <a:t>volledig elektrische personenauto's</a:t>
+              <a:t>volledig elektrische personenauto’s</a:t>
             </a:r>
             <a:endParaRPr lang="en-US" sz="1400" dirty="0"/>
           </a:p>
@@ -4487,7 +5418,7 @@
         <p:spPr>
           <a:xfrm>
             <a:off x="640080" y="548640"/>
-            <a:ext cx="7315200" cy="274320"/>
+            <a:ext cx="8229600" cy="274320"/>
           </a:xfrm>
           <a:prstGeom prst="rect">
             <a:avLst/>
@@ -4698,9 +5629,6 @@
           <a:lstStyle/>
           <a:p>
             <a:pPr indent="0" marL="0">
-              <a:lnSpc>
-                <a:spcPct val="100000"/>
-              </a:lnSpc>
               <a:buNone/>
             </a:pPr>
             <a:r>
@@ -4767,7 +5695,7 @@
             <a:avLst/>
           </a:prstGeom>
           <a:solidFill>
-            <a:srgbClr val="EAF0FA"/>
+            <a:srgbClr val="F7EDE3"/>
           </a:solidFill>
           <a:ln/>
         </p:spPr>
@@ -4829,7 +5757,7 @@
                 <a:ea typeface="Arial" pitchFamily="34" charset="-122"/>
                 <a:cs typeface="Arial" pitchFamily="34" charset="-120"/>
               </a:rPr>
-              <a:t>Twee smaken, beide suboptimaal</a:t>
+              <a:t>Vlucht naar publieke superchargers</a:t>
             </a:r>
             <a:endParaRPr lang="en-US" sz="1700" dirty="0"/>
           </a:p>
@@ -4857,9 +5785,6 @@
           <a:lstStyle/>
           <a:p>
             <a:pPr indent="0" marL="0">
-              <a:lnSpc>
-                <a:spcPct val="100000"/>
-              </a:lnSpc>
               <a:buNone/>
             </a:pPr>
             <a:r>
@@ -4871,7 +5796,7 @@
                 <a:ea typeface="Arial" pitchFamily="34" charset="-122"/>
                 <a:cs typeface="Arial" pitchFamily="34" charset="-120"/>
               </a:rPr>
-              <a:t>Strategieën mikken ofwel op laden buiten de werkuren, ofwel op supersnelladen. Geen van beide benut de aansluiting waar ze al sterk is.</a:t>
+              <a:t>Werknemers wijken uit naar publieke snelladers. Dat drijft de kost op én overbelast pleinen met beperkte capaciteit, met performantieverlies tot gevolg.</a:t>
             </a:r>
             <a:endParaRPr lang="en-US" sz="1300" dirty="0"/>
           </a:p>
@@ -4926,7 +5851,7 @@
             <a:avLst/>
           </a:prstGeom>
           <a:solidFill>
-            <a:srgbClr val="F7EDE3"/>
+            <a:srgbClr val="EAF0FA"/>
           </a:solidFill>
           <a:ln/>
         </p:spPr>
@@ -4988,7 +5913,7 @@
                 <a:ea typeface="Arial" pitchFamily="34" charset="-122"/>
                 <a:cs typeface="Arial" pitchFamily="34" charset="-120"/>
               </a:rPr>
-              <a:t>Vlucht naar publieke superchargers</a:t>
+              <a:t>Twee smaken, beide suboptimaal</a:t>
             </a:r>
             <a:endParaRPr lang="en-US" sz="1700" dirty="0"/>
           </a:p>
@@ -5016,9 +5941,6 @@
           <a:lstStyle/>
           <a:p>
             <a:pPr indent="0" marL="0">
-              <a:lnSpc>
-                <a:spcPct val="100000"/>
-              </a:lnSpc>
               <a:buNone/>
             </a:pPr>
             <a:r>
@@ -5030,7 +5952,27 @@
                 <a:ea typeface="Arial" pitchFamily="34" charset="-122"/>
                 <a:cs typeface="Arial" pitchFamily="34" charset="-120"/>
               </a:rPr>
-              <a:t>Werknemers wijken uit naar publieke snelladers. Dat drijft de kost op én overbelast pleinen met beperkte capaciteit, met performantieverlies tot gevolg.</a:t>
+              <a:t>Strategieën mikken ofwel op laden buiten de werkuren, ofwel op supersnelladen.</a:t>
+            </a:r>
+            <a:pPr indent="0" marL="0">
+              <a:buNone/>
+            </a:pPr>
+            <a:endParaRPr lang="en-US" sz="1300" dirty="0"/>
+          </a:p>
+          <a:p>
+            <a:pPr indent="0" marL="0">
+              <a:buNone/>
+            </a:pPr>
+            <a:r>
+              <a:rPr lang="en-US" sz="1300" b="1" i="1" dirty="0">
+                <a:solidFill>
+                  <a:srgbClr val="5A6473"/>
+                </a:solidFill>
+                <a:latin typeface="Arial" pitchFamily="34" charset="0"/>
+                <a:ea typeface="Arial" pitchFamily="34" charset="-122"/>
+                <a:cs typeface="Arial" pitchFamily="34" charset="-120"/>
+              </a:rPr>
+              <a:t>Geen van beide benut de aansluiting waar ze al sterk is.</a:t>
             </a:r>
             <a:endParaRPr lang="en-US" sz="1300" dirty="0"/>
           </a:p>
@@ -5155,7 +6097,7 @@
         <p:spPr>
           <a:xfrm>
             <a:off x="640080" y="548640"/>
-            <a:ext cx="7315200" cy="274320"/>
+            <a:ext cx="8229600" cy="274320"/>
           </a:xfrm>
           <a:prstGeom prst="rect">
             <a:avLst/>
@@ -5373,7 +6315,7 @@
                 <a:ea typeface="Arial" pitchFamily="34" charset="-122"/>
                 <a:cs typeface="Arial" pitchFamily="34" charset="-120"/>
               </a:rPr>
-              <a:t>Op zo'n locatie kunnen we </a:t>
+              <a:t>Op zo’n locatie kunnen we </a:t>
             </a:r>
             <a:pPr indent="0" marL="0">
               <a:lnSpc>
@@ -5407,7 +6349,7 @@
                 <a:ea typeface="Arial" pitchFamily="34" charset="-122"/>
                 <a:cs typeface="Arial" pitchFamily="34" charset="-120"/>
               </a:rPr>
-              <a:t> in auto's steken als het gebouw zelf verbruikt — </a:t>
+              <a:t> in auto’s steken als het gebouw zelf verbruikt — </a:t>
             </a:r>
             <a:pPr indent="0" marL="0">
               <a:lnSpc>
@@ -5513,20 +6455,68 @@
           </a:p>
         </p:txBody>
       </p:sp>
-      <p:sp>
-        <p:nvSpPr>
-          <p:cNvPr id="9" name="Shape 6"/>
-          <p:cNvSpPr/>
-          <p:nvPr/>
-        </p:nvSpPr>
-        <p:spPr>
-          <a:xfrm>
-            <a:off x="7040880" y="1965960"/>
-            <a:ext cx="4507992" cy="3611880"/>
+      <p:pic>
+        <p:nvPicPr>
+          <p:cNvPr id="9" name="Image 1" descr="preencoded.png">    </p:cNvPr>
+          <p:cNvPicPr>
+            <a:picLocks noChangeAspect="1"/>
+          </p:cNvPicPr>
+          <p:nvPr/>
+        </p:nvPicPr>
+        <p:blipFill>
+          <a:blip r:embed="rId2"/>
+          <a:stretch>
+            <a:fillRect/>
+          </a:stretch>
+        </p:blipFill>
+        <p:spPr>
+          <a:xfrm>
+            <a:off x="8001000" y="1371600"/>
+            <a:ext cx="2560320" cy="1819656"/>
+          </a:xfrm>
+          <a:prstGeom prst="rect">
+            <a:avLst/>
+          </a:prstGeom>
+        </p:spPr>
+      </p:pic>
+      <p:pic>
+        <p:nvPicPr>
+          <p:cNvPr id="10" name="Image 2" descr="preencoded.png">    </p:cNvPr>
+          <p:cNvPicPr>
+            <a:picLocks noChangeAspect="1"/>
+          </p:cNvPicPr>
+          <p:nvPr/>
+        </p:nvPicPr>
+        <p:blipFill>
+          <a:blip r:embed="rId3"/>
+          <a:stretch>
+            <a:fillRect/>
+          </a:stretch>
+        </p:blipFill>
+        <p:spPr>
+          <a:xfrm>
+            <a:off x="8001000" y="3310128"/>
+            <a:ext cx="2560320" cy="2020824"/>
+          </a:xfrm>
+          <a:prstGeom prst="rect">
+            <a:avLst/>
+          </a:prstGeom>
+        </p:spPr>
+      </p:pic>
+      <p:sp>
+        <p:nvSpPr>
+          <p:cNvPr id="11" name="Shape 6"/>
+          <p:cNvSpPr/>
+          <p:nvPr/>
+        </p:nvSpPr>
+        <p:spPr>
+          <a:xfrm>
+            <a:off x="640080" y="5486400"/>
+            <a:ext cx="10908792" cy="868680"/>
           </a:xfrm>
           <a:prstGeom prst="roundRect">
             <a:avLst>
-              <a:gd name="adj" fmla="val 2532"/>
+              <a:gd name="adj" fmla="val 10526"/>
             </a:avLst>
           </a:prstGeom>
           <a:solidFill>
@@ -5544,14 +6534,14 @@
       </p:sp>
       <p:sp>
         <p:nvSpPr>
-          <p:cNvPr id="10" name="Shape 7"/>
-          <p:cNvSpPr/>
-          <p:nvPr/>
-        </p:nvSpPr>
-        <p:spPr>
-          <a:xfrm>
-            <a:off x="7315200" y="2240280"/>
-            <a:ext cx="640080" cy="640080"/>
+          <p:cNvPr id="12" name="Shape 7"/>
+          <p:cNvSpPr/>
+          <p:nvPr/>
+        </p:nvSpPr>
+        <p:spPr>
+          <a:xfrm>
+            <a:off x="868680" y="5641848"/>
+            <a:ext cx="548640" cy="548640"/>
           </a:xfrm>
           <a:prstGeom prst="ellipse">
             <a:avLst/>
@@ -5564,22 +6554,22 @@
       </p:sp>
       <p:pic>
         <p:nvPicPr>
-          <p:cNvPr id="11" name="Image 1" descr="preencoded.png">    </p:cNvPr>
+          <p:cNvPr id="13" name="Image 3" descr="preencoded.png">    </p:cNvPr>
           <p:cNvPicPr>
             <a:picLocks noChangeAspect="1"/>
           </p:cNvPicPr>
           <p:nvPr/>
         </p:nvPicPr>
         <p:blipFill>
-          <a:blip r:embed="rId2"/>
+          <a:blip r:embed="rId4"/>
           <a:stretch>
             <a:fillRect/>
           </a:stretch>
         </p:blipFill>
         <p:spPr>
           <a:xfrm>
-            <a:off x="7481621" y="2406701"/>
-            <a:ext cx="307238" cy="307238"/>
+            <a:off x="1011326" y="5784494"/>
+            <a:ext cx="263347" cy="263347"/>
           </a:xfrm>
           <a:prstGeom prst="rect">
             <a:avLst/>
@@ -5588,30 +6578,30 @@
       </p:pic>
       <p:sp>
         <p:nvSpPr>
-          <p:cNvPr id="12" name="Text 8"/>
-          <p:cNvSpPr/>
-          <p:nvPr/>
-        </p:nvSpPr>
-        <p:spPr>
-          <a:xfrm>
-            <a:off x="8092440" y="2286000"/>
-            <a:ext cx="3291840" cy="457200"/>
-          </a:xfrm>
-          <a:prstGeom prst="rect">
-            <a:avLst/>
-          </a:prstGeom>
-          <a:noFill/>
-          <a:ln/>
-        </p:spPr>
-        <p:txBody>
-          <a:bodyPr wrap="square" lIns="0" tIns="0" rIns="0" bIns="0" rtlCol="0" anchor="ctr"/>
-          <a:lstStyle/>
-          <a:p>
-            <a:pPr indent="0" marL="0">
-              <a:buNone/>
-            </a:pPr>
-            <a:r>
-              <a:rPr lang="en-US" sz="2000" b="1" dirty="0">
+          <p:cNvPr id="14" name="Text 8"/>
+          <p:cNvSpPr/>
+          <p:nvPr/>
+        </p:nvSpPr>
+        <p:spPr>
+          <a:xfrm>
+            <a:off x="1572768" y="5650992"/>
+            <a:ext cx="1737360" cy="548640"/>
+          </a:xfrm>
+          <a:prstGeom prst="rect">
+            <a:avLst/>
+          </a:prstGeom>
+          <a:noFill/>
+          <a:ln/>
+        </p:spPr>
+        <p:txBody>
+          <a:bodyPr wrap="square" lIns="0" tIns="0" rIns="0" bIns="0" rtlCol="0" anchor="ctr"/>
+          <a:lstStyle/>
+          <a:p>
+            <a:pPr indent="0" marL="0">
+              <a:buNone/>
+            </a:pPr>
+            <a:r>
+              <a:rPr lang="en-US" sz="1700" b="1" dirty="0">
                 <a:solidFill>
                   <a:srgbClr val="FFFFFF"/>
                 </a:solidFill>
@@ -5621,20 +6611,20 @@
               </a:rPr>
               <a:t>Loadfactor</a:t>
             </a:r>
-            <a:endParaRPr lang="en-US" sz="2000" dirty="0"/>
-          </a:p>
-        </p:txBody>
-      </p:sp>
-      <p:sp>
-        <p:nvSpPr>
-          <p:cNvPr id="13" name="Text 9"/>
-          <p:cNvSpPr/>
-          <p:nvPr/>
-        </p:nvSpPr>
-        <p:spPr>
-          <a:xfrm>
-            <a:off x="7315200" y="3154680"/>
-            <a:ext cx="3977640" cy="1371600"/>
+            <a:endParaRPr lang="en-US" sz="1700" dirty="0"/>
+          </a:p>
+        </p:txBody>
+      </p:sp>
+      <p:sp>
+        <p:nvSpPr>
+          <p:cNvPr id="15" name="Text 9"/>
+          <p:cNvSpPr/>
+          <p:nvPr/>
+        </p:nvSpPr>
+        <p:spPr>
+          <a:xfrm>
+            <a:off x="3154680" y="5577840"/>
+            <a:ext cx="5029200" cy="713232"/>
           </a:xfrm>
           <a:prstGeom prst="rect">
             <a:avLst/>
@@ -5648,12 +6638,12 @@
           <a:p>
             <a:pPr indent="0" marL="0">
               <a:lnSpc>
-                <a:spcPct val="112000"/>
+                <a:spcPct val="104000"/>
               </a:lnSpc>
               <a:buNone/>
             </a:pPr>
             <a:r>
-              <a:rPr lang="en-US" sz="1400" dirty="0">
+              <a:rPr lang="en-US" sz="1100" dirty="0">
                 <a:solidFill>
                   <a:srgbClr val="DCE6F5"/>
                 </a:solidFill>
@@ -5663,36 +6653,39 @@
               </a:rPr>
               <a:t>De verhouding tussen het werkelijke verbruik per jaar en de energie die geleverd zou kunnen worden als men constant op het maximale vermogen zou leveren.</a:t>
             </a:r>
-            <a:endParaRPr lang="en-US" sz="1400" dirty="0"/>
-          </a:p>
-        </p:txBody>
-      </p:sp>
-      <p:sp>
-        <p:nvSpPr>
-          <p:cNvPr id="14" name="Text 10"/>
-          <p:cNvSpPr/>
-          <p:nvPr/>
-        </p:nvSpPr>
-        <p:spPr>
-          <a:xfrm>
-            <a:off x="7315200" y="4800600"/>
-            <a:ext cx="3977640" cy="548640"/>
-          </a:xfrm>
-          <a:prstGeom prst="rect">
-            <a:avLst/>
-          </a:prstGeom>
-          <a:noFill/>
-          <a:ln/>
-        </p:spPr>
-        <p:txBody>
-          <a:bodyPr wrap="square" lIns="0" tIns="0" rIns="0" bIns="0" rtlCol="0" anchor="ctr"/>
-          <a:lstStyle/>
-          <a:p>
-            <a:pPr indent="0" marL="0">
-              <a:buNone/>
-            </a:pPr>
-            <a:r>
-              <a:rPr lang="en-US" sz="1400" b="1" dirty="0">
+            <a:endParaRPr lang="en-US" sz="1100" dirty="0"/>
+          </a:p>
+        </p:txBody>
+      </p:sp>
+      <p:sp>
+        <p:nvSpPr>
+          <p:cNvPr id="16" name="Text 10"/>
+          <p:cNvSpPr/>
+          <p:nvPr/>
+        </p:nvSpPr>
+        <p:spPr>
+          <a:xfrm>
+            <a:off x="8366760" y="5577840"/>
+            <a:ext cx="3063240" cy="713232"/>
+          </a:xfrm>
+          <a:prstGeom prst="rect">
+            <a:avLst/>
+          </a:prstGeom>
+          <a:noFill/>
+          <a:ln/>
+        </p:spPr>
+        <p:txBody>
+          <a:bodyPr wrap="square" lIns="0" tIns="0" rIns="0" bIns="0" rtlCol="0" anchor="ctr"/>
+          <a:lstStyle/>
+          <a:p>
+            <a:pPr indent="0" marL="0">
+              <a:lnSpc>
+                <a:spcPct val="104000"/>
+              </a:lnSpc>
+              <a:buNone/>
+            </a:pPr>
+            <a:r>
+              <a:rPr lang="en-US" sz="1150" b="1" dirty="0">
                 <a:solidFill>
                   <a:srgbClr val="FFFFFF"/>
                 </a:solidFill>
@@ -5703,10 +6696,13 @@
               <a:t>Lage loadfactor = </a:t>
             </a:r>
             <a:pPr indent="0" marL="0">
-              <a:buNone/>
-            </a:pPr>
-            <a:r>
-              <a:rPr lang="en-US" sz="1400" dirty="0">
+              <a:lnSpc>
+                <a:spcPct val="104000"/>
+              </a:lnSpc>
+              <a:buNone/>
+            </a:pPr>
+            <a:r>
+              <a:rPr lang="en-US" sz="1150" dirty="0">
                 <a:solidFill>
                   <a:srgbClr val="9FE7B8"/>
                 </a:solidFill>
@@ -5716,13 +6712,13 @@
               </a:rPr>
               <a:t>veel ongebruikte, al betaalde capaciteit.</a:t>
             </a:r>
-            <a:endParaRPr lang="en-US" sz="1400" dirty="0"/>
-          </a:p>
-        </p:txBody>
-      </p:sp>
-      <p:sp>
-        <p:nvSpPr>
-          <p:cNvPr id="15" name="Text 11"/>
+            <a:endParaRPr lang="en-US" sz="1150" dirty="0"/>
+          </a:p>
+        </p:txBody>
+      </p:sp>
+      <p:sp>
+        <p:nvSpPr>
+          <p:cNvPr id="17" name="Text 11"/>
           <p:cNvSpPr/>
           <p:nvPr/>
         </p:nvSpPr>
@@ -5761,7 +6757,7 @@
       </p:sp>
       <p:sp>
         <p:nvSpPr>
-          <p:cNvPr id="16" name="Text 12"/>
+          <p:cNvPr id="18" name="Text 12"/>
           <p:cNvSpPr/>
           <p:nvPr/>
         </p:nvSpPr>
@@ -5839,7 +6835,7 @@
         <p:spPr>
           <a:xfrm>
             <a:off x="640080" y="548640"/>
-            <a:ext cx="7315200" cy="274320"/>
+            <a:ext cx="8229600" cy="274320"/>
           </a:xfrm>
           <a:prstGeom prst="rect">
             <a:avLst/>
@@ -5933,9 +6929,6 @@
           <a:lstStyle/>
           <a:p>
             <a:pPr indent="0" marL="0">
-              <a:lnSpc>
-                <a:spcPct val="105000"/>
-              </a:lnSpc>
               <a:buNone/>
             </a:pPr>
             <a:r>
@@ -6579,7 +7572,7 @@
         <p:spPr>
           <a:xfrm>
             <a:off x="640080" y="548640"/>
-            <a:ext cx="7315200" cy="274320"/>
+            <a:ext cx="8229600" cy="274320"/>
           </a:xfrm>
           <a:prstGeom prst="rect">
             <a:avLst/>
@@ -6698,8 +7691,11 @@
                 <a:ea typeface="Arial" pitchFamily="34" charset="-122"/>
                 <a:cs typeface="Arial" pitchFamily="34" charset="-120"/>
               </a:rPr>
-              <a:t>personeelswagens van bedrijven in Lommel</a:t>
-            </a:r>
+              <a:t>personeelswagens van bedrijven in en rond Lommel</a:t>
+            </a:r>
+            <a:pPr indent="0" marL="0">
+              <a:buNone/>
+            </a:pPr>
             <a:pPr indent="0" marL="0">
               <a:buNone/>
             </a:pPr>
@@ -6833,7 +7829,7 @@
               <a:buNone/>
             </a:pPr>
             <a:r>
-              <a:rPr lang="en-US" sz="3400" b="1" dirty="0">
+              <a:rPr lang="en-US" sz="3200" b="1" dirty="0">
                 <a:solidFill>
                   <a:srgbClr val="1F3864"/>
                 </a:solidFill>
@@ -6843,7 +7839,7 @@
               </a:rPr>
               <a:t>2.300</a:t>
             </a:r>
-            <a:endParaRPr lang="en-US" sz="3400" dirty="0"/>
+            <a:endParaRPr lang="en-US" sz="3200" dirty="0"/>
           </a:p>
         </p:txBody>
       </p:sp>
@@ -6945,7 +7941,7 @@
               <a:buNone/>
             </a:pPr>
             <a:r>
-              <a:rPr lang="en-US" sz="3400" b="1" dirty="0">
+              <a:rPr lang="en-US" sz="3200" b="1" dirty="0">
                 <a:solidFill>
                   <a:srgbClr val="1F3864"/>
                 </a:solidFill>
@@ -6955,7 +7951,7 @@
               </a:rPr>
               <a:t>43</a:t>
             </a:r>
-            <a:endParaRPr lang="en-US" sz="3400" dirty="0"/>
+            <a:endParaRPr lang="en-US" sz="3200" dirty="0"/>
           </a:p>
         </p:txBody>
       </p:sp>
@@ -6992,7 +7988,7 @@
                 <a:ea typeface="Arial" pitchFamily="34" charset="-122"/>
                 <a:cs typeface="Arial" pitchFamily="34" charset="-120"/>
               </a:rPr>
-              <a:t>geschikte bedrijfsparkings</a:t>
+              <a:t>bedrijfsparkings in en rond de gemeente</a:t>
             </a:r>
             <a:endParaRPr lang="en-US" sz="1200" dirty="0"/>
           </a:p>
@@ -7057,7 +8053,7 @@
               <a:buNone/>
             </a:pPr>
             <a:r>
-              <a:rPr lang="en-US" sz="3400" b="1" dirty="0">
+              <a:rPr lang="en-US" sz="3200" b="1" dirty="0">
                 <a:solidFill>
                   <a:srgbClr val="05B050"/>
                 </a:solidFill>
@@ -7067,7 +8063,7 @@
               </a:rPr>
               <a:t>€ 3,45 mln</a:t>
             </a:r>
-            <a:endParaRPr lang="en-US" sz="3400" dirty="0"/>
+            <a:endParaRPr lang="en-US" sz="3200" dirty="0"/>
           </a:p>
         </p:txBody>
       </p:sp>
@@ -7169,7 +8165,7 @@
               <a:buNone/>
             </a:pPr>
             <a:r>
-              <a:rPr lang="en-US" sz="3400" b="1" dirty="0">
+              <a:rPr lang="en-US" sz="3200" b="1" dirty="0">
                 <a:solidFill>
                   <a:srgbClr val="9E480E"/>
                 </a:solidFill>
@@ -7177,9 +8173,9 @@
                 <a:ea typeface="Arial" pitchFamily="34" charset="-122"/>
                 <a:cs typeface="Arial" pitchFamily="34" charset="-120"/>
               </a:rPr>
-              <a:t>€ 6,9 mln</a:t>
-            </a:r>
-            <a:endParaRPr lang="en-US" sz="3400" dirty="0"/>
+              <a:t>€ 6,90 mln</a:t>
+            </a:r>
+            <a:endParaRPr lang="en-US" sz="3200" dirty="0"/>
           </a:p>
         </p:txBody>
       </p:sp>
@@ -7379,7 +8375,7 @@
                 <a:ea typeface="Arial" pitchFamily="34" charset="-122"/>
                 <a:cs typeface="Arial" pitchFamily="34" charset="-120"/>
               </a:rPr>
-              <a:t>€ 6,9 mln investering</a:t>
+              <a:t>€ 6,90 mln investering</a:t>
             </a:r>
             <a:pPr indent="0" marL="0">
               <a:buNone/>
@@ -7518,7 +8514,7 @@
         <p:spPr>
           <a:xfrm>
             <a:off x="640080" y="548640"/>
-            <a:ext cx="7315200" cy="274320"/>
+            <a:ext cx="8229600" cy="274320"/>
           </a:xfrm>
           <a:prstGeom prst="rect">
             <a:avLst/>
@@ -7626,7 +8622,7 @@
       </p:sp>
       <p:pic>
         <p:nvPicPr>
-          <p:cNvPr id="5" name="Image 0" descr="kaart.png">    </p:cNvPr>
+          <p:cNvPr id="5" name="Image 0" descr="preencoded.png">    </p:cNvPr>
           <p:cNvPicPr>
             <a:picLocks noChangeAspect="1"/>
           </p:cNvPicPr>
@@ -7640,8 +8636,8 @@
         </p:blipFill>
         <p:spPr>
           <a:xfrm>
-            <a:off x="868680" y="2057400"/>
-            <a:ext cx="4892040" cy="3776472"/>
+            <a:off x="704088" y="1938528"/>
+            <a:ext cx="5221224" cy="4014216"/>
           </a:xfrm>
           <a:prstGeom prst="rect">
             <a:avLst/>
@@ -7651,6 +8647,50 @@
       <p:sp>
         <p:nvSpPr>
           <p:cNvPr id="6" name="Text 3"/>
+          <p:cNvSpPr/>
+          <p:nvPr/>
+        </p:nvSpPr>
+        <p:spPr>
+          <a:xfrm>
+            <a:off x="704088" y="5431536"/>
+            <a:ext cx="5221224" cy="521208"/>
+          </a:xfrm>
+          <a:prstGeom prst="rect">
+            <a:avLst/>
+          </a:prstGeom>
+          <a:solidFill>
+            <a:srgbClr val="1F3864"/>
+          </a:solidFill>
+          <a:ln/>
+        </p:spPr>
+        <p:txBody>
+          <a:bodyPr wrap="square" lIns="635" tIns="635" rIns="635" bIns="635" rtlCol="0" anchor="ctr"/>
+          <a:lstStyle/>
+          <a:p>
+            <a:pPr indent="0" marL="0">
+              <a:lnSpc>
+                <a:spcPct val="100000"/>
+              </a:lnSpc>
+              <a:buNone/>
+            </a:pPr>
+            <a:r>
+              <a:rPr lang="en-US" sz="900" i="1" dirty="0">
+                <a:solidFill>
+                  <a:srgbClr val="FFFFFF"/>
+                </a:solidFill>
+                <a:latin typeface="Arial" pitchFamily="34" charset="0"/>
+                <a:ea typeface="Arial" pitchFamily="34" charset="-122"/>
+                <a:cs typeface="Arial" pitchFamily="34" charset="-120"/>
+              </a:rPr>
+              <a:t>Gemeentegrens in blauw · gele stip = MS-cabine · oranje rand = parking net buiten de gemeente · interactieve kaart via de link.</a:t>
+            </a:r>
+            <a:endParaRPr lang="en-US" sz="900" dirty="0"/>
+          </a:p>
+        </p:txBody>
+      </p:sp>
+      <p:sp>
+        <p:nvSpPr>
+          <p:cNvPr id="7" name="Text 4"/>
           <p:cNvSpPr/>
           <p:nvPr/>
         </p:nvSpPr>
@@ -7689,7 +8729,7 @@
       </p:sp>
       <p:sp>
         <p:nvSpPr>
-          <p:cNvPr id="7" name="Text 4"/>
+          <p:cNvPr id="8" name="Text 5"/>
           <p:cNvSpPr/>
           <p:nvPr/>
         </p:nvSpPr>
@@ -7728,7 +8768,7 @@
       </p:sp>
       <p:sp>
         <p:nvSpPr>
-          <p:cNvPr id="8" name="Text 5">
+          <p:cNvPr id="9" name="Text 6">
             <a:hlinkClick r:id="rId2" tooltip=""/>
           </p:cNvPr>
           <p:cNvSpPr/>
@@ -7776,7 +8816,7 @@
       </p:sp>
       <p:sp>
         <p:nvSpPr>
-          <p:cNvPr id="9" name="Shape 6"/>
+          <p:cNvPr id="10" name="Shape 7"/>
           <p:cNvSpPr/>
           <p:nvPr/>
         </p:nvSpPr>
@@ -7796,7 +8836,7 @@
       </p:sp>
       <p:pic>
         <p:nvPicPr>
-          <p:cNvPr id="10" name="Image 1" descr="preencoded.png">    </p:cNvPr>
+          <p:cNvPr id="11" name="Image 1" descr="preencoded.png">    </p:cNvPr>
           <p:cNvPicPr>
             <a:picLocks noChangeAspect="1"/>
           </p:cNvPicPr>
@@ -7820,7 +8860,7 @@
       </p:pic>
       <p:sp>
         <p:nvSpPr>
-          <p:cNvPr id="11" name="Text 7"/>
+          <p:cNvPr id="12" name="Text 8"/>
           <p:cNvSpPr/>
           <p:nvPr/>
         </p:nvSpPr>
@@ -7862,7 +8902,7 @@
       </p:sp>
       <p:sp>
         <p:nvSpPr>
-          <p:cNvPr id="12" name="Shape 8"/>
+          <p:cNvPr id="13" name="Shape 9"/>
           <p:cNvSpPr/>
           <p:nvPr/>
         </p:nvSpPr>
@@ -7882,7 +8922,7 @@
       </p:sp>
       <p:pic>
         <p:nvPicPr>
-          <p:cNvPr id="13" name="Image 2" descr="preencoded.png">    </p:cNvPr>
+          <p:cNvPr id="14" name="Image 2" descr="preencoded.png">    </p:cNvPr>
           <p:cNvPicPr>
             <a:picLocks noChangeAspect="1"/>
           </p:cNvPicPr>
@@ -7906,7 +8946,7 @@
       </p:pic>
       <p:sp>
         <p:nvSpPr>
-          <p:cNvPr id="14" name="Text 9"/>
+          <p:cNvPr id="15" name="Text 10"/>
           <p:cNvSpPr/>
           <p:nvPr/>
         </p:nvSpPr>
@@ -7948,7 +8988,7 @@
       </p:sp>
       <p:sp>
         <p:nvSpPr>
-          <p:cNvPr id="15" name="Shape 10"/>
+          <p:cNvPr id="16" name="Shape 11"/>
           <p:cNvSpPr/>
           <p:nvPr/>
         </p:nvSpPr>
@@ -7968,7 +9008,7 @@
       </p:sp>
       <p:pic>
         <p:nvPicPr>
-          <p:cNvPr id="16" name="Image 3" descr="preencoded.png">    </p:cNvPr>
+          <p:cNvPr id="17" name="Image 3" descr="preencoded.png">    </p:cNvPr>
           <p:cNvPicPr>
             <a:picLocks noChangeAspect="1"/>
           </p:cNvPicPr>
@@ -7992,7 +9032,7 @@
       </p:pic>
       <p:sp>
         <p:nvSpPr>
-          <p:cNvPr id="17" name="Text 11"/>
+          <p:cNvPr id="18" name="Text 12"/>
           <p:cNvSpPr/>
           <p:nvPr/>
         </p:nvSpPr>
@@ -8034,7 +9074,7 @@
       </p:sp>
       <p:sp>
         <p:nvSpPr>
-          <p:cNvPr id="18" name="Text 12"/>
+          <p:cNvPr id="19" name="Text 13"/>
           <p:cNvSpPr/>
           <p:nvPr/>
         </p:nvSpPr>
@@ -8073,7 +9113,7 @@
       </p:sp>
       <p:sp>
         <p:nvSpPr>
-          <p:cNvPr id="19" name="Text 13"/>
+          <p:cNvPr id="20" name="Text 14"/>
           <p:cNvSpPr/>
           <p:nvPr/>
         </p:nvSpPr>
@@ -8151,7 +9191,7 @@
         <p:spPr>
           <a:xfrm>
             <a:off x="640080" y="548640"/>
-            <a:ext cx="7315200" cy="274320"/>
+            <a:ext cx="8229600" cy="274320"/>
           </a:xfrm>
           <a:prstGeom prst="rect">
             <a:avLst/>
@@ -8401,9 +9441,6 @@
           <a:lstStyle/>
           <a:p>
             <a:pPr indent="0" marL="0">
-              <a:lnSpc>
-                <a:spcPct val="105000"/>
-              </a:lnSpc>
               <a:buNone/>
             </a:pPr>
             <a:r>
@@ -8696,7 +9733,7 @@
         <p:spPr>
           <a:xfrm>
             <a:off x="6217920" y="1920240"/>
-            <a:ext cx="2578608" cy="3794760"/>
+            <a:ext cx="2578608" cy="4297680"/>
           </a:xfrm>
           <a:prstGeom prst="roundRect">
             <a:avLst>
@@ -8847,7 +9884,7 @@
         <p:spPr>
           <a:xfrm>
             <a:off x="6473952" y="3520440"/>
-            <a:ext cx="2121408" cy="2103120"/>
+            <a:ext cx="2121408" cy="868680"/>
           </a:xfrm>
           <a:prstGeom prst="rect">
             <a:avLst/>
@@ -8861,11 +9898,8 @@
           <a:p>
             <a:pPr indent="0" marL="0">
               <a:lnSpc>
-                <a:spcPct val="104000"/>
+                <a:spcPct val="105000"/>
               </a:lnSpc>
-              <a:spcAft>
-                <a:spcPts val="700"/>
-              </a:spcAft>
               <a:buNone/>
             </a:pPr>
             <a:r>
@@ -8877,36 +9911,77 @@
                 <a:ea typeface="Arial" pitchFamily="34" charset="-122"/>
                 <a:cs typeface="Arial" pitchFamily="34" charset="-120"/>
               </a:rPr>
-              <a:t>Alle laadoplossingen, batterijen en aansluiting — steeds op maat.</a:t>
+              <a:t>Aankoop, leasing (operationeel) of concessie. Aankoopcentrale voor entiteiten met aanbesteding.</a:t>
             </a:r>
             <a:endParaRPr lang="en-US" sz="1150" dirty="0"/>
           </a:p>
-          <a:p>
-            <a:pPr indent="0" marL="0">
-              <a:lnSpc>
-                <a:spcPct val="104000"/>
-              </a:lnSpc>
-              <a:buNone/>
-            </a:pPr>
-            <a:r>
-              <a:rPr lang="en-US" sz="1150" dirty="0">
-                <a:solidFill>
-                  <a:srgbClr val="DCE6F5"/>
-                </a:solidFill>
-                <a:latin typeface="Arial" pitchFamily="34" charset="0"/>
-                <a:ea typeface="Arial" pitchFamily="34" charset="-122"/>
-                <a:cs typeface="Arial" pitchFamily="34" charset="-120"/>
-              </a:rPr>
-              <a:t>Aankoop, </a:t>
-            </a:r>
-            <a:pPr indent="0" marL="0">
-              <a:lnSpc>
-                <a:spcPct val="104000"/>
-              </a:lnSpc>
-              <a:buNone/>
-            </a:pPr>
-            <a:r>
-              <a:rPr lang="en-US" sz="1150" b="1" dirty="0">
+        </p:txBody>
+      </p:sp>
+      <p:sp>
+        <p:nvSpPr>
+          <p:cNvPr id="22" name="Text 17"/>
+          <p:cNvSpPr/>
+          <p:nvPr/>
+        </p:nvSpPr>
+        <p:spPr>
+          <a:xfrm>
+            <a:off x="6473952" y="4553712"/>
+            <a:ext cx="1709928" cy="310896"/>
+          </a:xfrm>
+          <a:prstGeom prst="rect">
+            <a:avLst/>
+          </a:prstGeom>
+          <a:noFill/>
+          <a:ln/>
+        </p:spPr>
+        <p:txBody>
+          <a:bodyPr wrap="square" lIns="0" tIns="0" rIns="0" bIns="0" rtlCol="0" anchor="ctr"/>
+          <a:lstStyle/>
+          <a:p>
+            <a:pPr algn="l" indent="0" marL="0">
+              <a:buNone/>
+            </a:pPr>
+            <a:r>
+              <a:rPr lang="en-US" sz="1250" dirty="0">
+                <a:solidFill>
+                  <a:srgbClr val="FFFFFF"/>
+                </a:solidFill>
+                <a:latin typeface="Arial" pitchFamily="34" charset="0"/>
+                <a:ea typeface="Arial" pitchFamily="34" charset="-122"/>
+                <a:cs typeface="Arial" pitchFamily="34" charset="-120"/>
+              </a:rPr>
+              <a:t>Aankoop</a:t>
+            </a:r>
+            <a:endParaRPr lang="en-US" sz="1250" dirty="0"/>
+          </a:p>
+        </p:txBody>
+      </p:sp>
+      <p:sp>
+        <p:nvSpPr>
+          <p:cNvPr id="23" name="Text 18"/>
+          <p:cNvSpPr/>
+          <p:nvPr/>
+        </p:nvSpPr>
+        <p:spPr>
+          <a:xfrm>
+            <a:off x="8083296" y="4553712"/>
+            <a:ext cx="457200" cy="310896"/>
+          </a:xfrm>
+          <a:prstGeom prst="rect">
+            <a:avLst/>
+          </a:prstGeom>
+          <a:noFill/>
+          <a:ln/>
+        </p:spPr>
+        <p:txBody>
+          <a:bodyPr wrap="square" lIns="0" tIns="0" rIns="0" bIns="0" rtlCol="0" anchor="ctr"/>
+          <a:lstStyle/>
+          <a:p>
+            <a:pPr algn="r" indent="0" marL="0">
+              <a:buNone/>
+            </a:pPr>
+            <a:r>
+              <a:rPr lang="en-US" sz="1500" b="1" dirty="0">
                 <a:solidFill>
                   <a:srgbClr val="9FE7B8"/>
                 </a:solidFill>
@@ -8914,33 +9989,77 @@
                 <a:ea typeface="Arial" pitchFamily="34" charset="-122"/>
                 <a:cs typeface="Arial" pitchFamily="34" charset="-120"/>
               </a:rPr>
-              <a:t>leasing</a:t>
-            </a:r>
-            <a:pPr indent="0" marL="0">
-              <a:lnSpc>
-                <a:spcPct val="104000"/>
-              </a:lnSpc>
-              <a:buNone/>
-            </a:pPr>
-            <a:r>
-              <a:rPr lang="en-US" sz="1150" dirty="0">
-                <a:solidFill>
-                  <a:srgbClr val="DCE6F5"/>
-                </a:solidFill>
-                <a:latin typeface="Arial" pitchFamily="34" charset="0"/>
-                <a:ea typeface="Arial" pitchFamily="34" charset="-122"/>
-                <a:cs typeface="Arial" pitchFamily="34" charset="-120"/>
-              </a:rPr>
-              <a:t> (operationeel) of </a:t>
-            </a:r>
-            <a:pPr indent="0" marL="0">
-              <a:lnSpc>
-                <a:spcPct val="104000"/>
-              </a:lnSpc>
-              <a:buNone/>
-            </a:pPr>
-            <a:r>
-              <a:rPr lang="en-US" sz="1150" b="1" dirty="0">
+              <a:t>✓</a:t>
+            </a:r>
+            <a:endParaRPr lang="en-US" sz="1500" dirty="0"/>
+          </a:p>
+        </p:txBody>
+      </p:sp>
+      <p:sp>
+        <p:nvSpPr>
+          <p:cNvPr id="24" name="Text 19"/>
+          <p:cNvSpPr/>
+          <p:nvPr/>
+        </p:nvSpPr>
+        <p:spPr>
+          <a:xfrm>
+            <a:off x="6473952" y="4919472"/>
+            <a:ext cx="1709928" cy="310896"/>
+          </a:xfrm>
+          <a:prstGeom prst="rect">
+            <a:avLst/>
+          </a:prstGeom>
+          <a:noFill/>
+          <a:ln/>
+        </p:spPr>
+        <p:txBody>
+          <a:bodyPr wrap="square" lIns="0" tIns="0" rIns="0" bIns="0" rtlCol="0" anchor="ctr"/>
+          <a:lstStyle/>
+          <a:p>
+            <a:pPr algn="l" indent="0" marL="0">
+              <a:buNone/>
+            </a:pPr>
+            <a:r>
+              <a:rPr lang="en-US" sz="1250" dirty="0">
+                <a:solidFill>
+                  <a:srgbClr val="FFFFFF"/>
+                </a:solidFill>
+                <a:latin typeface="Arial" pitchFamily="34" charset="0"/>
+                <a:ea typeface="Arial" pitchFamily="34" charset="-122"/>
+                <a:cs typeface="Arial" pitchFamily="34" charset="-120"/>
+              </a:rPr>
+              <a:t>Leasing</a:t>
+            </a:r>
+            <a:endParaRPr lang="en-US" sz="1250" dirty="0"/>
+          </a:p>
+        </p:txBody>
+      </p:sp>
+      <p:sp>
+        <p:nvSpPr>
+          <p:cNvPr id="25" name="Text 20"/>
+          <p:cNvSpPr/>
+          <p:nvPr/>
+        </p:nvSpPr>
+        <p:spPr>
+          <a:xfrm>
+            <a:off x="8083296" y="4919472"/>
+            <a:ext cx="457200" cy="310896"/>
+          </a:xfrm>
+          <a:prstGeom prst="rect">
+            <a:avLst/>
+          </a:prstGeom>
+          <a:noFill/>
+          <a:ln/>
+        </p:spPr>
+        <p:txBody>
+          <a:bodyPr wrap="square" lIns="0" tIns="0" rIns="0" bIns="0" rtlCol="0" anchor="ctr"/>
+          <a:lstStyle/>
+          <a:p>
+            <a:pPr algn="r" indent="0" marL="0">
+              <a:buNone/>
+            </a:pPr>
+            <a:r>
+              <a:rPr lang="en-US" sz="1500" b="1" dirty="0">
                 <a:solidFill>
                   <a:srgbClr val="9FE7B8"/>
                 </a:solidFill>
@@ -8948,39 +10067,77 @@
                 <a:ea typeface="Arial" pitchFamily="34" charset="-122"/>
                 <a:cs typeface="Arial" pitchFamily="34" charset="-120"/>
               </a:rPr>
-              <a:t>concessie</a:t>
-            </a:r>
-            <a:pPr indent="0" marL="0">
-              <a:lnSpc>
-                <a:spcPct val="104000"/>
-              </a:lnSpc>
-              <a:spcAft>
-                <a:spcPts val="700"/>
-              </a:spcAft>
-              <a:buNone/>
-            </a:pPr>
-            <a:r>
-              <a:rPr lang="en-US" sz="1150" dirty="0">
-                <a:solidFill>
-                  <a:srgbClr val="DCE6F5"/>
-                </a:solidFill>
-                <a:latin typeface="Arial" pitchFamily="34" charset="0"/>
-                <a:ea typeface="Arial" pitchFamily="34" charset="-122"/>
-                <a:cs typeface="Arial" pitchFamily="34" charset="-120"/>
-              </a:rPr>
-              <a:t>.</a:t>
-            </a:r>
-            <a:endParaRPr lang="en-US" sz="1150" dirty="0"/>
-          </a:p>
-          <a:p>
-            <a:pPr indent="0" marL="0">
-              <a:lnSpc>
-                <a:spcPct val="104000"/>
-              </a:lnSpc>
-              <a:buNone/>
-            </a:pPr>
-            <a:r>
-              <a:rPr lang="en-US" sz="1150" b="1" dirty="0">
+              <a:t>✓</a:t>
+            </a:r>
+            <a:endParaRPr lang="en-US" sz="1500" dirty="0"/>
+          </a:p>
+        </p:txBody>
+      </p:sp>
+      <p:sp>
+        <p:nvSpPr>
+          <p:cNvPr id="26" name="Text 21"/>
+          <p:cNvSpPr/>
+          <p:nvPr/>
+        </p:nvSpPr>
+        <p:spPr>
+          <a:xfrm>
+            <a:off x="6473952" y="5285232"/>
+            <a:ext cx="1709928" cy="310896"/>
+          </a:xfrm>
+          <a:prstGeom prst="rect">
+            <a:avLst/>
+          </a:prstGeom>
+          <a:noFill/>
+          <a:ln/>
+        </p:spPr>
+        <p:txBody>
+          <a:bodyPr wrap="square" lIns="0" tIns="0" rIns="0" bIns="0" rtlCol="0" anchor="ctr"/>
+          <a:lstStyle/>
+          <a:p>
+            <a:pPr algn="l" indent="0" marL="0">
+              <a:buNone/>
+            </a:pPr>
+            <a:r>
+              <a:rPr lang="en-US" sz="1250" dirty="0">
+                <a:solidFill>
+                  <a:srgbClr val="FFFFFF"/>
+                </a:solidFill>
+                <a:latin typeface="Arial" pitchFamily="34" charset="0"/>
+                <a:ea typeface="Arial" pitchFamily="34" charset="-122"/>
+                <a:cs typeface="Arial" pitchFamily="34" charset="-120"/>
+              </a:rPr>
+              <a:t>Concessie</a:t>
+            </a:r>
+            <a:endParaRPr lang="en-US" sz="1250" dirty="0"/>
+          </a:p>
+        </p:txBody>
+      </p:sp>
+      <p:sp>
+        <p:nvSpPr>
+          <p:cNvPr id="27" name="Text 22"/>
+          <p:cNvSpPr/>
+          <p:nvPr/>
+        </p:nvSpPr>
+        <p:spPr>
+          <a:xfrm>
+            <a:off x="8083296" y="5285232"/>
+            <a:ext cx="457200" cy="310896"/>
+          </a:xfrm>
+          <a:prstGeom prst="rect">
+            <a:avLst/>
+          </a:prstGeom>
+          <a:noFill/>
+          <a:ln/>
+        </p:spPr>
+        <p:txBody>
+          <a:bodyPr wrap="square" lIns="0" tIns="0" rIns="0" bIns="0" rtlCol="0" anchor="ctr"/>
+          <a:lstStyle/>
+          <a:p>
+            <a:pPr algn="r" indent="0" marL="0">
+              <a:buNone/>
+            </a:pPr>
+            <a:r>
+              <a:rPr lang="en-US" sz="1500" b="1" dirty="0">
                 <a:solidFill>
                   <a:srgbClr val="9FE7B8"/>
                 </a:solidFill>
@@ -8988,32 +10145,93 @@
                 <a:ea typeface="Arial" pitchFamily="34" charset="-122"/>
                 <a:cs typeface="Arial" pitchFamily="34" charset="-120"/>
               </a:rPr>
+              <a:t>✓</a:t>
+            </a:r>
+            <a:endParaRPr lang="en-US" sz="1500" dirty="0"/>
+          </a:p>
+        </p:txBody>
+      </p:sp>
+      <p:sp>
+        <p:nvSpPr>
+          <p:cNvPr id="28" name="Text 23"/>
+          <p:cNvSpPr/>
+          <p:nvPr/>
+        </p:nvSpPr>
+        <p:spPr>
+          <a:xfrm>
+            <a:off x="6473952" y="5650992"/>
+            <a:ext cx="1709928" cy="310896"/>
+          </a:xfrm>
+          <a:prstGeom prst="rect">
+            <a:avLst/>
+          </a:prstGeom>
+          <a:noFill/>
+          <a:ln/>
+        </p:spPr>
+        <p:txBody>
+          <a:bodyPr wrap="square" lIns="0" tIns="0" rIns="0" bIns="0" rtlCol="0" anchor="ctr"/>
+          <a:lstStyle/>
+          <a:p>
+            <a:pPr algn="l" indent="0" marL="0">
+              <a:buNone/>
+            </a:pPr>
+            <a:r>
+              <a:rPr lang="en-US" sz="1250" dirty="0">
+                <a:solidFill>
+                  <a:srgbClr val="FFFFFF"/>
+                </a:solidFill>
+                <a:latin typeface="Arial" pitchFamily="34" charset="0"/>
+                <a:ea typeface="Arial" pitchFamily="34" charset="-122"/>
+                <a:cs typeface="Arial" pitchFamily="34" charset="-120"/>
+              </a:rPr>
               <a:t>Aankoopcentrale</a:t>
             </a:r>
-            <a:pPr indent="0" marL="0">
-              <a:lnSpc>
-                <a:spcPct val="104000"/>
-              </a:lnSpc>
-              <a:buNone/>
-            </a:pPr>
-            <a:r>
-              <a:rPr lang="en-US" sz="1150" dirty="0">
-                <a:solidFill>
-                  <a:srgbClr val="DCE6F5"/>
-                </a:solidFill>
-                <a:latin typeface="Arial" pitchFamily="34" charset="0"/>
-                <a:ea typeface="Arial" pitchFamily="34" charset="-122"/>
-                <a:cs typeface="Arial" pitchFamily="34" charset="-120"/>
-              </a:rPr>
-              <a:t> voor entiteiten met aanbesteding.</a:t>
-            </a:r>
-            <a:endParaRPr lang="en-US" sz="1150" dirty="0"/>
-          </a:p>
-        </p:txBody>
-      </p:sp>
-      <p:sp>
-        <p:nvSpPr>
-          <p:cNvPr id="22" name="Shape 17"/>
+            <a:endParaRPr lang="en-US" sz="1250" dirty="0"/>
+          </a:p>
+        </p:txBody>
+      </p:sp>
+      <p:sp>
+        <p:nvSpPr>
+          <p:cNvPr id="29" name="Text 24"/>
+          <p:cNvSpPr/>
+          <p:nvPr/>
+        </p:nvSpPr>
+        <p:spPr>
+          <a:xfrm>
+            <a:off x="8083296" y="5650992"/>
+            <a:ext cx="457200" cy="310896"/>
+          </a:xfrm>
+          <a:prstGeom prst="rect">
+            <a:avLst/>
+          </a:prstGeom>
+          <a:noFill/>
+          <a:ln/>
+        </p:spPr>
+        <p:txBody>
+          <a:bodyPr wrap="square" lIns="0" tIns="0" rIns="0" bIns="0" rtlCol="0" anchor="ctr"/>
+          <a:lstStyle/>
+          <a:p>
+            <a:pPr algn="r" indent="0" marL="0">
+              <a:buNone/>
+            </a:pPr>
+            <a:r>
+              <a:rPr lang="en-US" sz="1500" b="1" dirty="0">
+                <a:solidFill>
+                  <a:srgbClr val="9FE7B8"/>
+                </a:solidFill>
+                <a:latin typeface="Arial" pitchFamily="34" charset="0"/>
+                <a:ea typeface="Arial" pitchFamily="34" charset="-122"/>
+                <a:cs typeface="Arial" pitchFamily="34" charset="-120"/>
+              </a:rPr>
+              <a:t>✓</a:t>
+            </a:r>
+            <a:endParaRPr lang="en-US" sz="1500" dirty="0"/>
+          </a:p>
+        </p:txBody>
+      </p:sp>
+      <p:sp>
+        <p:nvSpPr>
+          <p:cNvPr id="30" name="Shape 25"/>
           <p:cNvSpPr/>
           <p:nvPr/>
         </p:nvSpPr>
@@ -9047,7 +10265,7 @@
       </p:sp>
       <p:sp>
         <p:nvSpPr>
-          <p:cNvPr id="23" name="Shape 18"/>
+          <p:cNvPr id="31" name="Shape 26"/>
           <p:cNvSpPr/>
           <p:nvPr/>
         </p:nvSpPr>
@@ -9067,7 +10285,7 @@
       </p:sp>
       <p:pic>
         <p:nvPicPr>
-          <p:cNvPr id="24" name="Image 3" descr="preencoded.png">    </p:cNvPr>
+          <p:cNvPr id="32" name="Image 3" descr="preencoded.png">    </p:cNvPr>
           <p:cNvPicPr>
             <a:picLocks noChangeAspect="1"/>
           </p:cNvPicPr>
@@ -9091,7 +10309,7 @@
       </p:pic>
       <p:sp>
         <p:nvSpPr>
-          <p:cNvPr id="25" name="Text 19"/>
+          <p:cNvPr id="33" name="Text 27"/>
           <p:cNvSpPr/>
           <p:nvPr/>
         </p:nvSpPr>
@@ -9130,7 +10348,7 @@
       </p:sp>
       <p:sp>
         <p:nvSpPr>
-          <p:cNvPr id="26" name="Text 20"/>
+          <p:cNvPr id="34" name="Text 28"/>
           <p:cNvSpPr/>
           <p:nvPr/>
         </p:nvSpPr>
@@ -9169,7 +10387,7 @@
       </p:sp>
       <p:sp>
         <p:nvSpPr>
-          <p:cNvPr id="27" name="Text 21"/>
+          <p:cNvPr id="35" name="Text 29"/>
           <p:cNvSpPr/>
           <p:nvPr/>
         </p:nvSpPr>
@@ -9189,9 +10407,6 @@
           <a:lstStyle/>
           <a:p>
             <a:pPr indent="0" marL="0">
-              <a:lnSpc>
-                <a:spcPct val="105000"/>
-              </a:lnSpc>
               <a:buNone/>
             </a:pPr>
             <a:r>
@@ -9211,7 +10426,7 @@
       </p:sp>
       <p:sp>
         <p:nvSpPr>
-          <p:cNvPr id="28" name="Text 22"/>
+          <p:cNvPr id="36" name="Text 30"/>
           <p:cNvSpPr/>
           <p:nvPr/>
         </p:nvSpPr>
@@ -9250,7 +10465,7 @@
       </p:sp>
       <p:sp>
         <p:nvSpPr>
-          <p:cNvPr id="29" name="Text 23"/>
+          <p:cNvPr id="37" name="Text 31"/>
           <p:cNvSpPr/>
           <p:nvPr/>
         </p:nvSpPr>
@@ -9328,7 +10543,7 @@
         <p:spPr>
           <a:xfrm>
             <a:off x="640080" y="548640"/>
-            <a:ext cx="7315200" cy="274320"/>
+            <a:ext cx="8229600" cy="274320"/>
           </a:xfrm>
           <a:prstGeom prst="rect">
             <a:avLst/>
@@ -9468,11 +10683,11 @@
         <p:spPr>
           <a:xfrm>
             <a:off x="640080" y="3886200"/>
-            <a:ext cx="6126480" cy="1691640"/>
+            <a:ext cx="6126480" cy="1371600"/>
           </a:xfrm>
           <a:prstGeom prst="roundRect">
             <a:avLst>
-              <a:gd name="adj" fmla="val 5405"/>
+              <a:gd name="adj" fmla="val 6667"/>
             </a:avLst>
           </a:prstGeom>
           <a:solidFill>
@@ -9489,7 +10704,7 @@
         </p:nvSpPr>
         <p:spPr>
           <a:xfrm>
-            <a:off x="914400" y="4206240"/>
+            <a:off x="914400" y="4160520"/>
             <a:ext cx="640080" cy="640080"/>
           </a:xfrm>
           <a:prstGeom prst="ellipse">
@@ -9517,7 +10732,7 @@
         </p:blipFill>
         <p:spPr>
           <a:xfrm>
-            <a:off x="1080821" y="4372661"/>
+            <a:off x="1080821" y="4326941"/>
             <a:ext cx="307238" cy="307238"/>
           </a:xfrm>
           <a:prstGeom prst="rect">
@@ -9533,8 +10748,8 @@
         </p:nvSpPr>
         <p:spPr>
           <a:xfrm>
-            <a:off x="1828800" y="4160520"/>
-            <a:ext cx="4754880" cy="1143000"/>
+            <a:off x="1828800" y="4069080"/>
+            <a:ext cx="4754880" cy="1005840"/>
           </a:xfrm>
           <a:prstGeom prst="rect">
             <a:avLst/>
@@ -9553,7 +10768,7 @@
               <a:buNone/>
             </a:pPr>
             <a:r>
-              <a:rPr lang="en-US" sz="1500" b="1" dirty="0">
+              <a:rPr lang="en-US" sz="1400" b="1" dirty="0">
                 <a:solidFill>
                   <a:srgbClr val="1F3864"/>
                 </a:solidFill>
@@ -9561,7 +10776,7 @@
                 <a:ea typeface="Arial" pitchFamily="34" charset="-122"/>
                 <a:cs typeface="Arial" pitchFamily="34" charset="-120"/>
               </a:rPr>
-              <a:t>2.300 auto's op 43 slimme parkings </a:t>
+              <a:t>2.300 auto’s op 43 slimme parkings in Lommel </a:t>
             </a:r>
             <a:pPr indent="0" marL="0">
               <a:lnSpc>
@@ -9570,7 +10785,7 @@
               <a:buNone/>
             </a:pPr>
             <a:r>
-              <a:rPr lang="en-US" sz="1500" dirty="0">
+              <a:rPr lang="en-US" sz="1400" dirty="0">
                 <a:solidFill>
                   <a:srgbClr val="1A1A1A"/>
                 </a:solidFill>
@@ -9578,15 +10793,57 @@
                 <a:ea typeface="Arial" pitchFamily="34" charset="-122"/>
                 <a:cs typeface="Arial" pitchFamily="34" charset="-120"/>
               </a:rPr>
-              <a:t>halveren het risico op congestie in 2030.</a:t>
-            </a:r>
-            <a:endParaRPr lang="en-US" sz="1500" dirty="0"/>
+              <a:t>verhogen de loadfactor van 34% naar 65% en remmen de congestie af.</a:t>
+            </a:r>
+            <a:endParaRPr lang="en-US" sz="1400" dirty="0"/>
           </a:p>
         </p:txBody>
       </p:sp>
       <p:sp>
         <p:nvSpPr>
           <p:cNvPr id="9" name="Text 6"/>
+          <p:cNvSpPr/>
+          <p:nvPr/>
+        </p:nvSpPr>
+        <p:spPr>
+          <a:xfrm>
+            <a:off x="640080" y="5321808"/>
+            <a:ext cx="6126480" cy="384048"/>
+          </a:xfrm>
+          <a:prstGeom prst="rect">
+            <a:avLst/>
+          </a:prstGeom>
+          <a:noFill/>
+          <a:ln/>
+        </p:spPr>
+        <p:txBody>
+          <a:bodyPr wrap="square" lIns="0" tIns="0" rIns="0" bIns="0" rtlCol="0" anchor="ctr"/>
+          <a:lstStyle/>
+          <a:p>
+            <a:pPr indent="0" marL="0">
+              <a:lnSpc>
+                <a:spcPct val="100000"/>
+              </a:lnSpc>
+              <a:buNone/>
+            </a:pPr>
+            <a:r>
+              <a:rPr lang="en-US" sz="900" i="1" dirty="0">
+                <a:solidFill>
+                  <a:srgbClr val="5A6473"/>
+                </a:solidFill>
+                <a:latin typeface="Arial" pitchFamily="34" charset="0"/>
+                <a:ea typeface="Arial" pitchFamily="34" charset="-122"/>
+                <a:cs typeface="Arial" pitchFamily="34" charset="-120"/>
+              </a:rPr>
+              <a:t>* Loadfactor t.o.v. referentiestation: kopstation OVERI 70 (70 kV), 5.5 km van Lommel. · v5</a:t>
+            </a:r>
+            <a:endParaRPr lang="en-US" sz="900" dirty="0"/>
+          </a:p>
+        </p:txBody>
+      </p:sp>
+      <p:sp>
+        <p:nvSpPr>
+          <p:cNvPr id="10" name="Text 7"/>
           <p:cNvSpPr/>
           <p:nvPr/>
         </p:nvSpPr>
@@ -9623,25 +10880,240 @@
           </a:p>
         </p:txBody>
       </p:sp>
+      <p:pic>
+        <p:nvPicPr>
+          <p:cNvPr id="11" name="Image 1" descr="preencoded.png">    </p:cNvPr>
+          <p:cNvPicPr>
+            <a:picLocks noChangeAspect="1"/>
+          </p:cNvPicPr>
+          <p:nvPr/>
+        </p:nvPicPr>
+        <p:blipFill>
+          <a:blip r:embed="rId2"/>
+          <a:stretch>
+            <a:fillRect/>
+          </a:stretch>
+        </p:blipFill>
+        <p:spPr>
+          <a:xfrm>
+            <a:off x="7669987" y="2286000"/>
+            <a:ext cx="1691640" cy="979322"/>
+          </a:xfrm>
+          <a:prstGeom prst="rect">
+            <a:avLst/>
+          </a:prstGeom>
+        </p:spPr>
+      </p:pic>
+      <p:pic>
+        <p:nvPicPr>
+          <p:cNvPr id="12" name="Image 2" descr="preencoded.png">    </p:cNvPr>
+          <p:cNvPicPr>
+            <a:picLocks noChangeAspect="1"/>
+          </p:cNvPicPr>
+          <p:nvPr/>
+        </p:nvPicPr>
+        <p:blipFill>
+          <a:blip r:embed="rId3"/>
+          <a:stretch>
+            <a:fillRect/>
+          </a:stretch>
+        </p:blipFill>
+        <p:spPr>
+          <a:xfrm>
+            <a:off x="9670694" y="2286000"/>
+            <a:ext cx="1691640" cy="979322"/>
+          </a:xfrm>
+          <a:prstGeom prst="rect">
+            <a:avLst/>
+          </a:prstGeom>
+        </p:spPr>
+      </p:pic>
       <p:graphicFrame>
         <p:nvGraphicFramePr>
-          <p:cNvPr id="10" name="Chart 0" descr=""/>
+          <p:cNvPr id="13" name="Chart 0" descr=""/>
           <p:cNvGraphicFramePr/>
           <p:nvPr/>
         </p:nvGraphicFramePr>
         <p:xfrm>
-          <a:off x="7040880" y="2286000"/>
-          <a:ext cx="4572000" cy="3200400"/>
+          <a:off x="7040880" y="3246120"/>
+          <a:ext cx="4572000" cy="1965960"/>
         </p:xfrm>
         <a:graphic xmlns:a="http://schemas.openxmlformats.org/drawingml/2006/main">
           <a:graphicData uri="http://schemas.openxmlformats.org/drawingml/2006/chart">
-            <c:chart xmlns:c="http://schemas.openxmlformats.org/drawingml/2006/chart" r:id="rId2"/>
+            <c:chart xmlns:c="http://schemas.openxmlformats.org/drawingml/2006/chart" r:id="rId4"/>
           </a:graphicData>
         </a:graphic>
       </p:graphicFrame>
       <p:sp>
         <p:nvSpPr>
-          <p:cNvPr id="11" name="Text 7"/>
+          <p:cNvPr id="14" name="Text 8"/>
+          <p:cNvSpPr/>
+          <p:nvPr/>
+        </p:nvSpPr>
+        <p:spPr>
+          <a:xfrm>
+            <a:off x="7040880" y="5248656"/>
+            <a:ext cx="4572000" cy="475488"/>
+          </a:xfrm>
+          <a:prstGeom prst="rect">
+            <a:avLst/>
+          </a:prstGeom>
+          <a:noFill/>
+          <a:ln/>
+        </p:spPr>
+        <p:txBody>
+          <a:bodyPr wrap="square" lIns="0" tIns="0" rIns="0" bIns="0" rtlCol="0" anchor="ctr"/>
+          <a:lstStyle/>
+          <a:p>
+            <a:pPr indent="0" marL="0">
+              <a:lnSpc>
+                <a:spcPct val="100000"/>
+              </a:lnSpc>
+              <a:buNone/>
+            </a:pPr>
+            <a:r>
+              <a:rPr lang="en-US" sz="900" i="1" dirty="0">
+                <a:solidFill>
+                  <a:srgbClr val="5A6473"/>
+                </a:solidFill>
+                <a:latin typeface="Arial" pitchFamily="34" charset="0"/>
+                <a:ea typeface="Arial" pitchFamily="34" charset="-122"/>
+                <a:cs typeface="Arial" pitchFamily="34" charset="-120"/>
+              </a:rPr>
+              <a:t>Loadfactor van station OVERI 70 (70 kV) — dichtste kopstation bij Lommel, op ± 5.5 km. Flex ≈ 10 MW (11 kW/wagen + 10 kW batterij) op 50 MW firm capacity.</a:t>
+            </a:r>
+            <a:endParaRPr lang="en-US" sz="900" dirty="0"/>
+          </a:p>
+        </p:txBody>
+      </p:sp>
+      <p:sp>
+        <p:nvSpPr>
+          <p:cNvPr id="15" name="Shape 9"/>
+          <p:cNvSpPr/>
+          <p:nvPr/>
+        </p:nvSpPr>
+        <p:spPr>
+          <a:xfrm>
+            <a:off x="640080" y="5797296"/>
+            <a:ext cx="10908792" cy="585216"/>
+          </a:xfrm>
+          <a:prstGeom prst="roundRect">
+            <a:avLst>
+              <a:gd name="adj" fmla="val 12500"/>
+            </a:avLst>
+          </a:prstGeom>
+          <a:solidFill>
+            <a:srgbClr val="1F3864"/>
+          </a:solidFill>
+          <a:ln/>
+          <a:effectLst>
+            <a:outerShdw sx="100000" sy="100000" kx="0" ky="0" algn="bl" rotWithShape="0" blurRad="114300" dist="38100" dir="5400000">
+              <a:srgbClr val="000000">
+                <a:alpha val="10000"/>
+              </a:srgbClr>
+            </a:outerShdw>
+          </a:effectLst>
+        </p:spPr>
+      </p:sp>
+      <p:sp>
+        <p:nvSpPr>
+          <p:cNvPr id="16" name="Text 10"/>
+          <p:cNvSpPr/>
+          <p:nvPr/>
+        </p:nvSpPr>
+        <p:spPr>
+          <a:xfrm>
+            <a:off x="640080" y="5797296"/>
+            <a:ext cx="10908792" cy="585216"/>
+          </a:xfrm>
+          <a:prstGeom prst="rect">
+            <a:avLst/>
+          </a:prstGeom>
+          <a:noFill/>
+          <a:ln/>
+        </p:spPr>
+        <p:txBody>
+          <a:bodyPr wrap="square" lIns="0" tIns="0" rIns="0" bIns="0" rtlCol="0" anchor="ctr"/>
+          <a:lstStyle/>
+          <a:p>
+            <a:pPr algn="ctr" indent="0" marL="0">
+              <a:lnSpc>
+                <a:spcPct val="105000"/>
+              </a:lnSpc>
+              <a:buNone/>
+            </a:pPr>
+            <a:r>
+              <a:rPr lang="en-US" sz="1300" b="1" dirty="0">
+                <a:solidFill>
+                  <a:srgbClr val="FFFFFF"/>
+                </a:solidFill>
+                <a:latin typeface="Arial" pitchFamily="34" charset="0"/>
+                <a:ea typeface="Arial" pitchFamily="34" charset="-122"/>
+                <a:cs typeface="Arial" pitchFamily="34" charset="-120"/>
+              </a:rPr>
+              <a:t>Een slim laadplein zorgt voor een stijging van de bruikbare energie</a:t>
+            </a:r>
+            <a:endParaRPr lang="en-US" sz="1300" dirty="0"/>
+          </a:p>
+          <a:p>
+            <a:pPr algn="ctr" indent="0" marL="0">
+              <a:lnSpc>
+                <a:spcPct val="105000"/>
+              </a:lnSpc>
+              <a:buNone/>
+            </a:pPr>
+            <a:r>
+              <a:rPr lang="en-US" sz="1300" b="1" dirty="0">
+                <a:solidFill>
+                  <a:srgbClr val="FFFFFF"/>
+                </a:solidFill>
+                <a:latin typeface="Arial" pitchFamily="34" charset="0"/>
+                <a:ea typeface="Arial" pitchFamily="34" charset="-122"/>
+                <a:cs typeface="Arial" pitchFamily="34" charset="-120"/>
+              </a:rPr>
+              <a:t>voor bedrijven en gezinnen in Lommel met </a:t>
+            </a:r>
+            <a:pPr algn="ctr" indent="0" marL="0">
+              <a:lnSpc>
+                <a:spcPct val="105000"/>
+              </a:lnSpc>
+              <a:buNone/>
+            </a:pPr>
+            <a:r>
+              <a:rPr lang="en-US" sz="1300" b="1" dirty="0">
+                <a:solidFill>
+                  <a:srgbClr val="9FE7B8"/>
+                </a:solidFill>
+                <a:latin typeface="Arial" pitchFamily="34" charset="0"/>
+                <a:ea typeface="Arial" pitchFamily="34" charset="-122"/>
+                <a:cs typeface="Arial" pitchFamily="34" charset="-120"/>
+              </a:rPr>
+              <a:t>+91%</a:t>
+            </a:r>
+            <a:pPr algn="ctr" indent="0" marL="0">
+              <a:lnSpc>
+                <a:spcPct val="105000"/>
+              </a:lnSpc>
+              <a:buNone/>
+            </a:pPr>
+            <a:r>
+              <a:rPr lang="en-US" sz="1300" b="1" dirty="0">
+                <a:solidFill>
+                  <a:srgbClr val="FFFFFF"/>
+                </a:solidFill>
+                <a:latin typeface="Arial" pitchFamily="34" charset="0"/>
+                <a:ea typeface="Arial" pitchFamily="34" charset="-122"/>
+                <a:cs typeface="Arial" pitchFamily="34" charset="-120"/>
+              </a:rPr>
+              <a:t>.</a:t>
+            </a:r>
+            <a:endParaRPr lang="en-US" sz="1300" dirty="0"/>
+          </a:p>
+        </p:txBody>
+      </p:sp>
+      <p:sp>
+        <p:nvSpPr>
+          <p:cNvPr id="17" name="Text 11"/>
           <p:cNvSpPr/>
           <p:nvPr/>
         </p:nvSpPr>
@@ -9680,7 +11152,7 @@
       </p:sp>
       <p:sp>
         <p:nvSpPr>
-          <p:cNvPr id="12" name="Text 8"/>
+          <p:cNvPr id="18" name="Text 12"/>
           <p:cNvSpPr/>
           <p:nvPr/>
         </p:nvSpPr>

--- a/Fluctus_Laadplan_Lommel.pptx
+++ b/Fluctus_Laadplan_Lommel.pptx
@@ -118,7 +118,7 @@
 </p:presentation>
 </file>
 
-<file path=ppt/charts/chart1.xml><?xml version="1.0" encoding="utf-8"?>
+<file path=ppt/charts/chart2.xml><?xml version="1.0" encoding="utf-8"?>
 <c:chartSpace xmlns:c="http://schemas.openxmlformats.org/drawingml/2006/chart" xmlns:a="http://schemas.openxmlformats.org/drawingml/2006/main" xmlns:r="http://schemas.openxmlformats.org/officeDocument/2006/relationships">
   <c:date1904 val="0"/>
   <c:roundedCorners val="1"/>
@@ -220,10 +220,10 @@
                 <c:formatCode>General</c:formatCode>
                 <c:ptCount val="2"/>
                 <c:pt idx="0">
-                  <c:v>34</c:v>
+                  <c:v>33</c:v>
                 </c:pt>
                 <c:pt idx="1">
-                  <c:v>65</c:v>
+                  <c:v>64</c:v>
                 </c:pt>
               </c:numCache>
             </c:numRef>
@@ -3707,7 +3707,7 @@
                 <a:ea typeface="Arial" pitchFamily="34" charset="-122"/>
                 <a:cs typeface="Arial" pitchFamily="34" charset="-120"/>
               </a:rPr>
-              <a:t>+91% meer energie</a:t>
+              <a:t>+94% meer energie</a:t>
             </a:r>
             <a:pPr indent="0" marL="0">
               <a:lnSpc>
@@ -10793,7 +10793,7 @@
                 <a:ea typeface="Arial" pitchFamily="34" charset="-122"/>
                 <a:cs typeface="Arial" pitchFamily="34" charset="-120"/>
               </a:rPr>
-              <a:t>verhogen de loadfactor van 34% naar 65% en remmen de congestie af.</a:t>
+              <a:t>verhogen de loadfactor van 33% naar 64% en remmen de congestie af.</a:t>
             </a:r>
             <a:endParaRPr lang="en-US" sz="1400" dirty="0"/>
           </a:p>
@@ -10835,7 +10835,7 @@
                 <a:ea typeface="Arial" pitchFamily="34" charset="-122"/>
                 <a:cs typeface="Arial" pitchFamily="34" charset="-120"/>
               </a:rPr>
-              <a:t>* Loadfactor t.o.v. referentiestation: kopstation OVERI 70 (70 kV), 5.5 km van Lommel. · v5</a:t>
+              <a:t>* Loadfactor t.o.v. referentiestation: kopstation OVERP150 (150 kV), 6 km van Lommel (laagste load van de cluster &lt;5 km). · v5</a:t>
             </a:r>
             <a:endParaRPr lang="en-US" sz="900" dirty="0"/>
           </a:p>
@@ -10980,7 +10980,7 @@
                 <a:ea typeface="Arial" pitchFamily="34" charset="-122"/>
                 <a:cs typeface="Arial" pitchFamily="34" charset="-120"/>
               </a:rPr>
-              <a:t>Loadfactor van station OVERI 70 (70 kV) — dichtste kopstation bij Lommel, op ± 5.5 km. Flex ≈ 10 MW (11 kW/wagen + 10 kW batterij) op 50 MW firm capacity.</a:t>
+              <a:t>Loadfactor van station OVERP150 (150 kV) — dichtste kopstation bij Lommel, op ± 6 km (laagste load van de cluster &lt;5 km). Flex ≈ 35 MW (11 kW/wagen + 10 kW batterij) op 175 MW firm capacity.</a:t>
             </a:r>
             <a:endParaRPr lang="en-US" sz="900" dirty="0"/>
           </a:p>
@@ -11088,7 +11088,7 @@
                 <a:ea typeface="Arial" pitchFamily="34" charset="-122"/>
                 <a:cs typeface="Arial" pitchFamily="34" charset="-120"/>
               </a:rPr>
-              <a:t>+91%</a:t>
+              <a:t>+94%</a:t>
             </a:r>
             <a:pPr algn="ctr" indent="0" marL="0">
               <a:lnSpc>

--- a/Fluctus_Laadplan_Lommel.pptx
+++ b/Fluctus_Laadplan_Lommel.pptx
@@ -118,7 +118,7 @@
 </p:presentation>
 </file>
 
-<file path=ppt/charts/chart2.xml><?xml version="1.0" encoding="utf-8"?>
+<file path=ppt/charts/chart1.xml><?xml version="1.0" encoding="utf-8"?>
 <c:chartSpace xmlns:c="http://schemas.openxmlformats.org/drawingml/2006/chart" xmlns:a="http://schemas.openxmlformats.org/drawingml/2006/main" xmlns:r="http://schemas.openxmlformats.org/officeDocument/2006/relationships">
   <c:date1904 val="0"/>
   <c:roundedCorners val="1"/>
@@ -10835,7 +10835,7 @@
                 <a:ea typeface="Arial" pitchFamily="34" charset="-122"/>
                 <a:cs typeface="Arial" pitchFamily="34" charset="-120"/>
               </a:rPr>
-              <a:t>* Loadfactor t.o.v. referentiestation: kopstation OVERP150 (150 kV), 6 km van Lommel (laagste load van de cluster &lt;5 km). · v5</a:t>
+              <a:t>* Loadfactor t.o.v. referentiestation: kopstation OVERP150 (150 kV), 6 km van Lommel (laagste load van de cluster &lt;5 km). · v6</a:t>
             </a:r>
             <a:endParaRPr lang="en-US" sz="900" dirty="0"/>
           </a:p>

--- a/Fluctus_Laadplan_Lommel.pptx
+++ b/Fluctus_Laadplan_Lommel.pptx
@@ -118,7 +118,7 @@
 </p:presentation>
 </file>
 
-<file path=ppt/charts/chart1.xml><?xml version="1.0" encoding="utf-8"?>
+<file path=ppt/charts/chart2.xml><?xml version="1.0" encoding="utf-8"?>
 <c:chartSpace xmlns:c="http://schemas.openxmlformats.org/drawingml/2006/chart" xmlns:a="http://schemas.openxmlformats.org/drawingml/2006/main" xmlns:r="http://schemas.openxmlformats.org/officeDocument/2006/relationships">
   <c:date1904 val="0"/>
   <c:roundedCorners val="1"/>

--- a/Fluctus_Laadplan_Lommel.pptx
+++ b/Fluctus_Laadplan_Lommel.pptx
@@ -118,7 +118,7 @@
 </p:presentation>
 </file>
 
-<file path=ppt/charts/chart2.xml><?xml version="1.0" encoding="utf-8"?>
+<file path=ppt/charts/chart3.xml><?xml version="1.0" encoding="utf-8"?>
 <c:chartSpace xmlns:c="http://schemas.openxmlformats.org/drawingml/2006/chart" xmlns:a="http://schemas.openxmlformats.org/drawingml/2006/main" xmlns:r="http://schemas.openxmlformats.org/officeDocument/2006/relationships">
   <c:date1904 val="0"/>
   <c:roundedCorners val="1"/>

--- a/Fluctus_Laadplan_Lommel.pptx
+++ b/Fluctus_Laadplan_Lommel.pptx
@@ -118,7 +118,7 @@
 </p:presentation>
 </file>
 
-<file path=ppt/charts/chart3.xml><?xml version="1.0" encoding="utf-8"?>
+<file path=ppt/charts/chart1.xml><?xml version="1.0" encoding="utf-8"?>
 <c:chartSpace xmlns:c="http://schemas.openxmlformats.org/drawingml/2006/chart" xmlns:a="http://schemas.openxmlformats.org/drawingml/2006/main" xmlns:r="http://schemas.openxmlformats.org/officeDocument/2006/relationships">
   <c:date1904 val="0"/>
   <c:roundedCorners val="1"/>

--- a/Fluctus_Laadplan_Lommel.pptx
+++ b/Fluctus_Laadplan_Lommel.pptx
@@ -118,7 +118,7 @@
 </p:presentation>
 </file>
 
-<file path=ppt/charts/chart1.xml><?xml version="1.0" encoding="utf-8"?>
+<file path=ppt/charts/chart3.xml><?xml version="1.0" encoding="utf-8"?>
 <c:chartSpace xmlns:c="http://schemas.openxmlformats.org/drawingml/2006/chart" xmlns:a="http://schemas.openxmlformats.org/drawingml/2006/main" xmlns:r="http://schemas.openxmlformats.org/officeDocument/2006/relationships">
   <c:date1904 val="0"/>
   <c:roundedCorners val="1"/>
@@ -7677,7 +7677,7 @@
                 <a:ea typeface="Arial" pitchFamily="34" charset="-122"/>
                 <a:cs typeface="Arial" pitchFamily="34" charset="-120"/>
               </a:rPr>
-              <a:t>De 2.300 wagens zijn de </a:t>
+              <a:t>De 7.647 wagens zijn de </a:t>
             </a:r>
             <a:pPr indent="0" marL="0">
               <a:buNone/>
@@ -7696,6 +7696,17 @@
             <a:pPr indent="0" marL="0">
               <a:buNone/>
             </a:pPr>
+            <a:r>
+              <a:rPr lang="en-US" sz="1500" dirty="0">
+                <a:solidFill>
+                  <a:srgbClr val="1A1A1A"/>
+                </a:solidFill>
+                <a:latin typeface="Arial" pitchFamily="34" charset="0"/>
+                <a:ea typeface="Arial" pitchFamily="34" charset="-122"/>
+                <a:cs typeface="Arial" pitchFamily="34" charset="-120"/>
+              </a:rPr>
+              <a:t> (de gemeente zelf + 54 parkings in de band van ±2 km rond de grens)</a:t>
+            </a:r>
             <a:pPr indent="0" marL="0">
               <a:buNone/>
             </a:pPr>
@@ -7837,7 +7848,7 @@
                 <a:ea typeface="Arial" pitchFamily="34" charset="-122"/>
                 <a:cs typeface="Arial" pitchFamily="34" charset="-120"/>
               </a:rPr>
-              <a:t>2.300</a:t>
+              <a:t>7.647</a:t>
             </a:r>
             <a:endParaRPr lang="en-US" sz="3200" dirty="0"/>
           </a:p>
@@ -7949,7 +7960,7 @@
                 <a:ea typeface="Arial" pitchFamily="34" charset="-122"/>
                 <a:cs typeface="Arial" pitchFamily="34" charset="-120"/>
               </a:rPr>
-              <a:t>43</a:t>
+              <a:t>241</a:t>
             </a:r>
             <a:endParaRPr lang="en-US" sz="3200" dirty="0"/>
           </a:p>
@@ -8061,7 +8072,7 @@
                 <a:ea typeface="Arial" pitchFamily="34" charset="-122"/>
                 <a:cs typeface="Arial" pitchFamily="34" charset="-120"/>
               </a:rPr>
-              <a:t>€ 3,45 mln</a:t>
+              <a:t>€ 11,47 mln</a:t>
             </a:r>
             <a:endParaRPr lang="en-US" sz="3200" dirty="0"/>
           </a:p>
@@ -8173,7 +8184,7 @@
                 <a:ea typeface="Arial" pitchFamily="34" charset="-122"/>
                 <a:cs typeface="Arial" pitchFamily="34" charset="-120"/>
               </a:rPr>
-              <a:t>€ 6,90 mln</a:t>
+              <a:t>€ 22,94 mln</a:t>
             </a:r>
             <a:endParaRPr lang="en-US" sz="3200" dirty="0"/>
           </a:p>
@@ -8280,7 +8291,7 @@
                 <a:ea typeface="Arial" pitchFamily="34" charset="-122"/>
                 <a:cs typeface="Arial" pitchFamily="34" charset="-120"/>
               </a:rPr>
-              <a:t>2.300 wagens</a:t>
+              <a:t>7.647 wagens</a:t>
             </a:r>
             <a:pPr indent="0" marL="0">
               <a:buNone/>
@@ -8308,7 +8319,7 @@
                 <a:ea typeface="Arial" pitchFamily="34" charset="-122"/>
                 <a:cs typeface="Arial" pitchFamily="34" charset="-120"/>
               </a:rPr>
-              <a:t>€ 3,45 mln besparing / jaar</a:t>
+              <a:t>€ 11,47 mln besparing / jaar</a:t>
             </a:r>
             <a:endParaRPr lang="en-US" sz="1500" dirty="0"/>
           </a:p>
@@ -8347,7 +8358,7 @@
                 <a:ea typeface="Arial" pitchFamily="34" charset="-122"/>
                 <a:cs typeface="Arial" pitchFamily="34" charset="-120"/>
               </a:rPr>
-              <a:t>2.300 wagens</a:t>
+              <a:t>7.647 wagens</a:t>
             </a:r>
             <a:pPr indent="0" marL="0">
               <a:buNone/>
@@ -8375,7 +8386,7 @@
                 <a:ea typeface="Arial" pitchFamily="34" charset="-122"/>
                 <a:cs typeface="Arial" pitchFamily="34" charset="-120"/>
               </a:rPr>
-              <a:t>€ 6,90 mln investering</a:t>
+              <a:t>€ 22,94 mln investering</a:t>
             </a:r>
             <a:pPr indent="0" marL="0">
               <a:buNone/>
@@ -8721,7 +8732,7 @@
                 <a:ea typeface="Arial" pitchFamily="34" charset="-122"/>
                 <a:cs typeface="Arial" pitchFamily="34" charset="-120"/>
               </a:rPr>
-              <a:t>43 parkings · 2.300 plaatsen</a:t>
+              <a:t>241 parkings · 7.647 plaatsen</a:t>
             </a:r>
             <a:endParaRPr lang="en-US" sz="2200" dirty="0"/>
           </a:p>
@@ -10776,7 +10787,7 @@
                 <a:ea typeface="Arial" pitchFamily="34" charset="-122"/>
                 <a:cs typeface="Arial" pitchFamily="34" charset="-120"/>
               </a:rPr>
-              <a:t>2.300 auto’s op 43 slimme parkings in Lommel </a:t>
+              <a:t>5.543 auto’s op 187 slimme parkings in Lommel </a:t>
             </a:r>
             <a:pPr indent="0" marL="0">
               <a:lnSpc>

--- a/Fluctus_Laadplan_Lommel.pptx
+++ b/Fluctus_Laadplan_Lommel.pptx
@@ -118,7 +118,7 @@
 </p:presentation>
 </file>
 
-<file path=ppt/charts/chart3.xml><?xml version="1.0" encoding="utf-8"?>
+<file path=ppt/charts/chart4.xml><?xml version="1.0" encoding="utf-8"?>
 <c:chartSpace xmlns:c="http://schemas.openxmlformats.org/drawingml/2006/chart" xmlns:a="http://schemas.openxmlformats.org/drawingml/2006/main" xmlns:r="http://schemas.openxmlformats.org/officeDocument/2006/relationships">
   <c:date1904 val="0"/>
   <c:roundedCorners val="1"/>
@@ -7677,7 +7677,7 @@
                 <a:ea typeface="Arial" pitchFamily="34" charset="-122"/>
                 <a:cs typeface="Arial" pitchFamily="34" charset="-120"/>
               </a:rPr>
-              <a:t>De 7.647 wagens zijn de </a:t>
+              <a:t>De 5.977 wagens zijn de </a:t>
             </a:r>
             <a:pPr indent="0" marL="0">
               <a:buNone/>
@@ -7696,17 +7696,6 @@
             <a:pPr indent="0" marL="0">
               <a:buNone/>
             </a:pPr>
-            <a:r>
-              <a:rPr lang="en-US" sz="1500" dirty="0">
-                <a:solidFill>
-                  <a:srgbClr val="1A1A1A"/>
-                </a:solidFill>
-                <a:latin typeface="Arial" pitchFamily="34" charset="0"/>
-                <a:ea typeface="Arial" pitchFamily="34" charset="-122"/>
-                <a:cs typeface="Arial" pitchFamily="34" charset="-120"/>
-              </a:rPr>
-              <a:t> (de gemeente zelf + 54 parkings in de band van ±2 km rond de grens)</a:t>
-            </a:r>
             <a:pPr indent="0" marL="0">
               <a:buNone/>
             </a:pPr>
@@ -7848,7 +7837,7 @@
                 <a:ea typeface="Arial" pitchFamily="34" charset="-122"/>
                 <a:cs typeface="Arial" pitchFamily="34" charset="-120"/>
               </a:rPr>
-              <a:t>7.647</a:t>
+              <a:t>5.977</a:t>
             </a:r>
             <a:endParaRPr lang="en-US" sz="3200" dirty="0"/>
           </a:p>
@@ -7960,7 +7949,7 @@
                 <a:ea typeface="Arial" pitchFamily="34" charset="-122"/>
                 <a:cs typeface="Arial" pitchFamily="34" charset="-120"/>
               </a:rPr>
-              <a:t>241</a:t>
+              <a:t>210</a:t>
             </a:r>
             <a:endParaRPr lang="en-US" sz="3200" dirty="0"/>
           </a:p>
@@ -8072,7 +8061,7 @@
                 <a:ea typeface="Arial" pitchFamily="34" charset="-122"/>
                 <a:cs typeface="Arial" pitchFamily="34" charset="-120"/>
               </a:rPr>
-              <a:t>€ 11,47 mln</a:t>
+              <a:t>€ 8,97 mln</a:t>
             </a:r>
             <a:endParaRPr lang="en-US" sz="3200" dirty="0"/>
           </a:p>
@@ -8184,7 +8173,7 @@
                 <a:ea typeface="Arial" pitchFamily="34" charset="-122"/>
                 <a:cs typeface="Arial" pitchFamily="34" charset="-120"/>
               </a:rPr>
-              <a:t>€ 22,94 mln</a:t>
+              <a:t>€ 17,93 mln</a:t>
             </a:r>
             <a:endParaRPr lang="en-US" sz="3200" dirty="0"/>
           </a:p>
@@ -8291,7 +8280,7 @@
                 <a:ea typeface="Arial" pitchFamily="34" charset="-122"/>
                 <a:cs typeface="Arial" pitchFamily="34" charset="-120"/>
               </a:rPr>
-              <a:t>7.647 wagens</a:t>
+              <a:t>5.977 wagens</a:t>
             </a:r>
             <a:pPr indent="0" marL="0">
               <a:buNone/>
@@ -8319,7 +8308,7 @@
                 <a:ea typeface="Arial" pitchFamily="34" charset="-122"/>
                 <a:cs typeface="Arial" pitchFamily="34" charset="-120"/>
               </a:rPr>
-              <a:t>€ 11,47 mln besparing / jaar</a:t>
+              <a:t>€ 8,97 mln besparing / jaar</a:t>
             </a:r>
             <a:endParaRPr lang="en-US" sz="1500" dirty="0"/>
           </a:p>
@@ -8358,7 +8347,7 @@
                 <a:ea typeface="Arial" pitchFamily="34" charset="-122"/>
                 <a:cs typeface="Arial" pitchFamily="34" charset="-120"/>
               </a:rPr>
-              <a:t>7.647 wagens</a:t>
+              <a:t>5.977 wagens</a:t>
             </a:r>
             <a:pPr indent="0" marL="0">
               <a:buNone/>
@@ -8386,7 +8375,7 @@
                 <a:ea typeface="Arial" pitchFamily="34" charset="-122"/>
                 <a:cs typeface="Arial" pitchFamily="34" charset="-120"/>
               </a:rPr>
-              <a:t>€ 22,94 mln investering</a:t>
+              <a:t>€ 17,93 mln investering</a:t>
             </a:r>
             <a:pPr indent="0" marL="0">
               <a:buNone/>
@@ -8732,7 +8721,7 @@
                 <a:ea typeface="Arial" pitchFamily="34" charset="-122"/>
                 <a:cs typeface="Arial" pitchFamily="34" charset="-120"/>
               </a:rPr>
-              <a:t>241 parkings · 7.647 plaatsen</a:t>
+              <a:t>210 parkings · 5.977 plaatsen</a:t>
             </a:r>
             <a:endParaRPr lang="en-US" sz="2200" dirty="0"/>
           </a:p>
@@ -10787,7 +10776,7 @@
                 <a:ea typeface="Arial" pitchFamily="34" charset="-122"/>
                 <a:cs typeface="Arial" pitchFamily="34" charset="-120"/>
               </a:rPr>
-              <a:t>5.543 auto’s op 187 slimme parkings in Lommel </a:t>
+              <a:t>5.977 auto’s op 210 slimme parkings in Lommel </a:t>
             </a:r>
             <a:pPr indent="0" marL="0">
               <a:lnSpc>

--- a/Fluctus_Laadplan_Lommel.pptx
+++ b/Fluctus_Laadplan_Lommel.pptx
@@ -118,7 +118,7 @@
 </p:presentation>
 </file>
 
-<file path=ppt/charts/chart4.xml><?xml version="1.0" encoding="utf-8"?>
+<file path=ppt/charts/chart1.xml><?xml version="1.0" encoding="utf-8"?>
 <c:chartSpace xmlns:c="http://schemas.openxmlformats.org/drawingml/2006/chart" xmlns:a="http://schemas.openxmlformats.org/drawingml/2006/main" xmlns:r="http://schemas.openxmlformats.org/officeDocument/2006/relationships">
   <c:date1904 val="0"/>
   <c:roundedCorners val="1"/>
@@ -220,10 +220,10 @@
                 <c:formatCode>General</c:formatCode>
                 <c:ptCount val="2"/>
                 <c:pt idx="0">
-                  <c:v>33</c:v>
+                  <c:v>32</c:v>
                 </c:pt>
                 <c:pt idx="1">
-                  <c:v>64</c:v>
+                  <c:v>32</c:v>
                 </c:pt>
               </c:numCache>
             </c:numRef>
@@ -304,7 +304,7 @@
         <c:axId val="2094734552"/>
         <c:scaling>
           <c:orientation val="minMax"/>
-          <c:max val="80"/>
+          <c:max val="50"/>
           <c:min val="0"/>
         </c:scaling>
         <c:delete val="0"/>
@@ -3707,7 +3707,7 @@
                 <a:ea typeface="Arial" pitchFamily="34" charset="-122"/>
                 <a:cs typeface="Arial" pitchFamily="34" charset="-120"/>
               </a:rPr>
-              <a:t>+94% meer energie</a:t>
+              <a:t>+0% meer energie</a:t>
             </a:r>
             <a:pPr indent="0" marL="0">
               <a:lnSpc>
@@ -7677,7 +7677,7 @@
                 <a:ea typeface="Arial" pitchFamily="34" charset="-122"/>
                 <a:cs typeface="Arial" pitchFamily="34" charset="-120"/>
               </a:rPr>
-              <a:t>De 5.977 wagens zijn de </a:t>
+              <a:t>De 0 wagens zijn de </a:t>
             </a:r>
             <a:pPr indent="0" marL="0">
               <a:buNone/>
@@ -7837,7 +7837,7 @@
                 <a:ea typeface="Arial" pitchFamily="34" charset="-122"/>
                 <a:cs typeface="Arial" pitchFamily="34" charset="-120"/>
               </a:rPr>
-              <a:t>5.977</a:t>
+              <a:t>0</a:t>
             </a:r>
             <a:endParaRPr lang="en-US" sz="3200" dirty="0"/>
           </a:p>
@@ -7949,7 +7949,7 @@
                 <a:ea typeface="Arial" pitchFamily="34" charset="-122"/>
                 <a:cs typeface="Arial" pitchFamily="34" charset="-120"/>
               </a:rPr>
-              <a:t>210</a:t>
+              <a:t>0</a:t>
             </a:r>
             <a:endParaRPr lang="en-US" sz="3200" dirty="0"/>
           </a:p>
@@ -8061,7 +8061,7 @@
                 <a:ea typeface="Arial" pitchFamily="34" charset="-122"/>
                 <a:cs typeface="Arial" pitchFamily="34" charset="-120"/>
               </a:rPr>
-              <a:t>€ 8,97 mln</a:t>
+              <a:t>€ 0,00 mln</a:t>
             </a:r>
             <a:endParaRPr lang="en-US" sz="3200" dirty="0"/>
           </a:p>
@@ -8173,7 +8173,7 @@
                 <a:ea typeface="Arial" pitchFamily="34" charset="-122"/>
                 <a:cs typeface="Arial" pitchFamily="34" charset="-120"/>
               </a:rPr>
-              <a:t>€ 17,93 mln</a:t>
+              <a:t>€ 0,00 mln</a:t>
             </a:r>
             <a:endParaRPr lang="en-US" sz="3200" dirty="0"/>
           </a:p>
@@ -8280,7 +8280,7 @@
                 <a:ea typeface="Arial" pitchFamily="34" charset="-122"/>
                 <a:cs typeface="Arial" pitchFamily="34" charset="-120"/>
               </a:rPr>
-              <a:t>5.977 wagens</a:t>
+              <a:t>0 wagens</a:t>
             </a:r>
             <a:pPr indent="0" marL="0">
               <a:buNone/>
@@ -8308,7 +8308,7 @@
                 <a:ea typeface="Arial" pitchFamily="34" charset="-122"/>
                 <a:cs typeface="Arial" pitchFamily="34" charset="-120"/>
               </a:rPr>
-              <a:t>€ 8,97 mln besparing / jaar</a:t>
+              <a:t>€ 0,00 mln besparing / jaar</a:t>
             </a:r>
             <a:endParaRPr lang="en-US" sz="1500" dirty="0"/>
           </a:p>
@@ -8347,7 +8347,7 @@
                 <a:ea typeface="Arial" pitchFamily="34" charset="-122"/>
                 <a:cs typeface="Arial" pitchFamily="34" charset="-120"/>
               </a:rPr>
-              <a:t>5.977 wagens</a:t>
+              <a:t>0 wagens</a:t>
             </a:r>
             <a:pPr indent="0" marL="0">
               <a:buNone/>
@@ -8375,7 +8375,7 @@
                 <a:ea typeface="Arial" pitchFamily="34" charset="-122"/>
                 <a:cs typeface="Arial" pitchFamily="34" charset="-120"/>
               </a:rPr>
-              <a:t>€ 17,93 mln investering</a:t>
+              <a:t>€ 0,00 mln investering</a:t>
             </a:r>
             <a:pPr indent="0" marL="0">
               <a:buNone/>
@@ -8721,7 +8721,7 @@
                 <a:ea typeface="Arial" pitchFamily="34" charset="-122"/>
                 <a:cs typeface="Arial" pitchFamily="34" charset="-120"/>
               </a:rPr>
-              <a:t>210 parkings · 5.977 plaatsen</a:t>
+              <a:t>0 parkings · 0 plaatsen</a:t>
             </a:r>
             <a:endParaRPr lang="en-US" sz="2200" dirty="0"/>
           </a:p>
@@ -10776,7 +10776,7 @@
                 <a:ea typeface="Arial" pitchFamily="34" charset="-122"/>
                 <a:cs typeface="Arial" pitchFamily="34" charset="-120"/>
               </a:rPr>
-              <a:t>5.977 auto’s op 210 slimme parkings in Lommel </a:t>
+              <a:t>0 auto’s op 0 slimme parkings in Lommel </a:t>
             </a:r>
             <a:pPr indent="0" marL="0">
               <a:lnSpc>
@@ -10793,7 +10793,7 @@
                 <a:ea typeface="Arial" pitchFamily="34" charset="-122"/>
                 <a:cs typeface="Arial" pitchFamily="34" charset="-120"/>
               </a:rPr>
-              <a:t>verhogen de loadfactor van 33% naar 64% en remmen de congestie af.</a:t>
+              <a:t>verhogen de loadfactor van 32% naar 32% en remmen de congestie af.</a:t>
             </a:r>
             <a:endParaRPr lang="en-US" sz="1400" dirty="0"/>
           </a:p>
@@ -10835,7 +10835,7 @@
                 <a:ea typeface="Arial" pitchFamily="34" charset="-122"/>
                 <a:cs typeface="Arial" pitchFamily="34" charset="-120"/>
               </a:rPr>
-              <a:t>* Loadfactor t.o.v. referentiestation: kopstation OVERP150 (150 kV), 6 km van Lommel (laagste load van de cluster &lt;5 km). · v6</a:t>
+              <a:t>* Loadfactor t.o.v. referentiestation: kopstation BALEN150 (150 kV), 5.1 km van Lommel. · v6</a:t>
             </a:r>
             <a:endParaRPr lang="en-US" sz="900" dirty="0"/>
           </a:p>
@@ -10980,7 +10980,7 @@
                 <a:ea typeface="Arial" pitchFamily="34" charset="-122"/>
                 <a:cs typeface="Arial" pitchFamily="34" charset="-120"/>
               </a:rPr>
-              <a:t>Loadfactor van station OVERP150 (150 kV) — dichtste kopstation bij Lommel, op ± 6 km (laagste load van de cluster &lt;5 km). Flex ≈ 35 MW (11 kW/wagen + 10 kW batterij) op 175 MW firm capacity.</a:t>
+              <a:t>Loadfactor van station BALEN150 (150 kV) — dichtste kopstation bij Lommel, op ± 5.1 km. Flex ≈ 0 MW (11 kW/wagen + 10 kW batterij) op 175 MW firm capacity.</a:t>
             </a:r>
             <a:endParaRPr lang="en-US" sz="900" dirty="0"/>
           </a:p>
@@ -11088,7 +11088,7 @@
                 <a:ea typeface="Arial" pitchFamily="34" charset="-122"/>
                 <a:cs typeface="Arial" pitchFamily="34" charset="-120"/>
               </a:rPr>
-              <a:t>+94%</a:t>
+              <a:t>+0%</a:t>
             </a:r>
             <a:pPr algn="ctr" indent="0" marL="0">
               <a:lnSpc>

--- a/Fluctus_Laadplan_Lommel.pptx
+++ b/Fluctus_Laadplan_Lommel.pptx
@@ -223,7 +223,7 @@
                   <c:v>32</c:v>
                 </c:pt>
                 <c:pt idx="1">
-                  <c:v>32</c:v>
+                  <c:v>64</c:v>
                 </c:pt>
               </c:numCache>
             </c:numRef>
@@ -304,7 +304,7 @@
         <c:axId val="2094734552"/>
         <c:scaling>
           <c:orientation val="minMax"/>
-          <c:max val="50"/>
+          <c:max val="80"/>
           <c:min val="0"/>
         </c:scaling>
         <c:delete val="0"/>
@@ -3707,7 +3707,7 @@
                 <a:ea typeface="Arial" pitchFamily="34" charset="-122"/>
                 <a:cs typeface="Arial" pitchFamily="34" charset="-120"/>
               </a:rPr>
-              <a:t>+0% meer energie</a:t>
+              <a:t>+100% meer energie</a:t>
             </a:r>
             <a:pPr indent="0" marL="0">
               <a:lnSpc>
@@ -7677,7 +7677,7 @@
                 <a:ea typeface="Arial" pitchFamily="34" charset="-122"/>
                 <a:cs typeface="Arial" pitchFamily="34" charset="-120"/>
               </a:rPr>
-              <a:t>De 0 wagens zijn de </a:t>
+              <a:t>De 7.647 wagens zijn de </a:t>
             </a:r>
             <a:pPr indent="0" marL="0">
               <a:buNone/>
@@ -7696,6 +7696,17 @@
             <a:pPr indent="0" marL="0">
               <a:buNone/>
             </a:pPr>
+            <a:r>
+              <a:rPr lang="en-US" sz="1500" dirty="0">
+                <a:solidFill>
+                  <a:srgbClr val="1A1A1A"/>
+                </a:solidFill>
+                <a:latin typeface="Arial" pitchFamily="34" charset="0"/>
+                <a:ea typeface="Arial" pitchFamily="34" charset="-122"/>
+                <a:cs typeface="Arial" pitchFamily="34" charset="-120"/>
+              </a:rPr>
+              <a:t> (de gemeente zelf + 54 parkings in de band van ±2 km rond de grens)</a:t>
+            </a:r>
             <a:pPr indent="0" marL="0">
               <a:buNone/>
             </a:pPr>
@@ -7837,7 +7848,7 @@
                 <a:ea typeface="Arial" pitchFamily="34" charset="-122"/>
                 <a:cs typeface="Arial" pitchFamily="34" charset="-120"/>
               </a:rPr>
-              <a:t>0</a:t>
+              <a:t>7.647</a:t>
             </a:r>
             <a:endParaRPr lang="en-US" sz="3200" dirty="0"/>
           </a:p>
@@ -7949,7 +7960,7 @@
                 <a:ea typeface="Arial" pitchFamily="34" charset="-122"/>
                 <a:cs typeface="Arial" pitchFamily="34" charset="-120"/>
               </a:rPr>
-              <a:t>0</a:t>
+              <a:t>241</a:t>
             </a:r>
             <a:endParaRPr lang="en-US" sz="3200" dirty="0"/>
           </a:p>
@@ -8061,7 +8072,7 @@
                 <a:ea typeface="Arial" pitchFamily="34" charset="-122"/>
                 <a:cs typeface="Arial" pitchFamily="34" charset="-120"/>
               </a:rPr>
-              <a:t>€ 0,00 mln</a:t>
+              <a:t>€ 11,47 mln</a:t>
             </a:r>
             <a:endParaRPr lang="en-US" sz="3200" dirty="0"/>
           </a:p>
@@ -8173,7 +8184,7 @@
                 <a:ea typeface="Arial" pitchFamily="34" charset="-122"/>
                 <a:cs typeface="Arial" pitchFamily="34" charset="-120"/>
               </a:rPr>
-              <a:t>€ 0,00 mln</a:t>
+              <a:t>€ 22,94 mln</a:t>
             </a:r>
             <a:endParaRPr lang="en-US" sz="3200" dirty="0"/>
           </a:p>
@@ -8280,7 +8291,7 @@
                 <a:ea typeface="Arial" pitchFamily="34" charset="-122"/>
                 <a:cs typeface="Arial" pitchFamily="34" charset="-120"/>
               </a:rPr>
-              <a:t>0 wagens</a:t>
+              <a:t>7.647 wagens</a:t>
             </a:r>
             <a:pPr indent="0" marL="0">
               <a:buNone/>
@@ -8308,7 +8319,7 @@
                 <a:ea typeface="Arial" pitchFamily="34" charset="-122"/>
                 <a:cs typeface="Arial" pitchFamily="34" charset="-120"/>
               </a:rPr>
-              <a:t>€ 0,00 mln besparing / jaar</a:t>
+              <a:t>€ 11,47 mln besparing / jaar</a:t>
             </a:r>
             <a:endParaRPr lang="en-US" sz="1500" dirty="0"/>
           </a:p>
@@ -8347,7 +8358,7 @@
                 <a:ea typeface="Arial" pitchFamily="34" charset="-122"/>
                 <a:cs typeface="Arial" pitchFamily="34" charset="-120"/>
               </a:rPr>
-              <a:t>0 wagens</a:t>
+              <a:t>7.647 wagens</a:t>
             </a:r>
             <a:pPr indent="0" marL="0">
               <a:buNone/>
@@ -8375,7 +8386,7 @@
                 <a:ea typeface="Arial" pitchFamily="34" charset="-122"/>
                 <a:cs typeface="Arial" pitchFamily="34" charset="-120"/>
               </a:rPr>
-              <a:t>€ 0,00 mln investering</a:t>
+              <a:t>€ 22,94 mln investering</a:t>
             </a:r>
             <a:pPr indent="0" marL="0">
               <a:buNone/>
@@ -8721,7 +8732,7 @@
                 <a:ea typeface="Arial" pitchFamily="34" charset="-122"/>
                 <a:cs typeface="Arial" pitchFamily="34" charset="-120"/>
               </a:rPr>
-              <a:t>0 parkings · 0 plaatsen</a:t>
+              <a:t>241 parkings · 7.647 plaatsen</a:t>
             </a:r>
             <a:endParaRPr lang="en-US" sz="2200" dirty="0"/>
           </a:p>
@@ -10776,7 +10787,7 @@
                 <a:ea typeface="Arial" pitchFamily="34" charset="-122"/>
                 <a:cs typeface="Arial" pitchFamily="34" charset="-120"/>
               </a:rPr>
-              <a:t>0 auto’s op 0 slimme parkings in Lommel </a:t>
+              <a:t>5.543 auto’s op 187 slimme parkings in Lommel </a:t>
             </a:r>
             <a:pPr indent="0" marL="0">
               <a:lnSpc>
@@ -10793,7 +10804,7 @@
                 <a:ea typeface="Arial" pitchFamily="34" charset="-122"/>
                 <a:cs typeface="Arial" pitchFamily="34" charset="-120"/>
               </a:rPr>
-              <a:t>verhogen de loadfactor van 32% naar 32% en remmen de congestie af.</a:t>
+              <a:t>verhogen de loadfactor van 32% naar 64% en remmen de congestie af.</a:t>
             </a:r>
             <a:endParaRPr lang="en-US" sz="1400" dirty="0"/>
           </a:p>
@@ -10980,7 +10991,7 @@
                 <a:ea typeface="Arial" pitchFamily="34" charset="-122"/>
                 <a:cs typeface="Arial" pitchFamily="34" charset="-120"/>
               </a:rPr>
-              <a:t>Loadfactor van station BALEN150 (150 kV) — dichtste kopstation bij Lommel, op ± 5.1 km. Flex ≈ 0 MW (11 kW/wagen + 10 kW batterij) op 175 MW firm capacity.</a:t>
+              <a:t>Loadfactor van station BALEN150 (150 kV) — dichtste kopstation bij Lommel, op ± 5.1 km. Flex ≈ 35 MW (11 kW/wagen + 10 kW batterij) op 175 MW firm capacity.</a:t>
             </a:r>
             <a:endParaRPr lang="en-US" sz="900" dirty="0"/>
           </a:p>
@@ -11088,7 +11099,7 @@
                 <a:ea typeface="Arial" pitchFamily="34" charset="-122"/>
                 <a:cs typeface="Arial" pitchFamily="34" charset="-120"/>
               </a:rPr>
-              <a:t>+0%</a:t>
+              <a:t>+100%</a:t>
             </a:r>
             <a:pPr algn="ctr" indent="0" marL="0">
               <a:lnSpc>

--- a/Fluctus_Laadplan_Lommel.pptx
+++ b/Fluctus_Laadplan_Lommel.pptx
@@ -118,7 +118,7 @@
 </p:presentation>
 </file>
 
-<file path=ppt/charts/chart1.xml><?xml version="1.0" encoding="utf-8"?>
+<file path=ppt/charts/chart3.xml><?xml version="1.0" encoding="utf-8"?>
 <c:chartSpace xmlns:c="http://schemas.openxmlformats.org/drawingml/2006/chart" xmlns:a="http://schemas.openxmlformats.org/drawingml/2006/main" xmlns:r="http://schemas.openxmlformats.org/officeDocument/2006/relationships">
   <c:date1904 val="0"/>
   <c:roundedCorners val="1"/>

--- a/Fluctus_Laadplan_Lommel.pptx
+++ b/Fluctus_Laadplan_Lommel.pptx
@@ -118,7 +118,7 @@
 </p:presentation>
 </file>
 
-<file path=ppt/charts/chart3.xml><?xml version="1.0" encoding="utf-8"?>
+<file path=ppt/charts/chart1.xml><?xml version="1.0" encoding="utf-8"?>
 <c:chartSpace xmlns:c="http://schemas.openxmlformats.org/drawingml/2006/chart" xmlns:a="http://schemas.openxmlformats.org/drawingml/2006/main" xmlns:r="http://schemas.openxmlformats.org/officeDocument/2006/relationships">
   <c:date1904 val="0"/>
   <c:roundedCorners val="1"/>
@@ -8827,7 +8827,46 @@
       </p:sp>
       <p:sp>
         <p:nvSpPr>
-          <p:cNvPr id="10" name="Shape 7"/>
+          <p:cNvPr id="10" name="Text 7"/>
+          <p:cNvSpPr/>
+          <p:nvPr/>
+        </p:nvSpPr>
+        <p:spPr>
+          <a:xfrm>
+            <a:off x="640080" y="6071616"/>
+            <a:ext cx="10058400" cy="237744"/>
+          </a:xfrm>
+          <a:prstGeom prst="rect">
+            <a:avLst/>
+          </a:prstGeom>
+          <a:noFill/>
+          <a:ln/>
+        </p:spPr>
+        <p:txBody>
+          <a:bodyPr wrap="square" lIns="0" tIns="0" rIns="0" bIns="0" rtlCol="0" anchor="ctr"/>
+          <a:lstStyle/>
+          <a:p>
+            <a:pPr indent="0" marL="0">
+              <a:buNone/>
+            </a:pPr>
+            <a:r>
+              <a:rPr lang="en-US" sz="800" i="1" dirty="0">
+                <a:solidFill>
+                  <a:srgbClr val="5A6473"/>
+                </a:solidFill>
+                <a:latin typeface="Arial" pitchFamily="34" charset="0"/>
+                <a:ea typeface="Arial" pitchFamily="34" charset="-122"/>
+                <a:cs typeface="Arial" pitchFamily="34" charset="-120"/>
+              </a:rPr>
+              <a:t>Bron bestaande laadpunten: Departement Mobiliteit en Openbare Werken (Vlaanderen).</a:t>
+            </a:r>
+            <a:endParaRPr lang="en-US" sz="800" dirty="0"/>
+          </a:p>
+        </p:txBody>
+      </p:sp>
+      <p:sp>
+        <p:nvSpPr>
+          <p:cNvPr id="11" name="Shape 8"/>
           <p:cNvSpPr/>
           <p:nvPr/>
         </p:nvSpPr>
@@ -8847,7 +8886,7 @@
       </p:sp>
       <p:pic>
         <p:nvPicPr>
-          <p:cNvPr id="11" name="Image 1" descr="preencoded.png">    </p:cNvPr>
+          <p:cNvPr id="12" name="Image 1" descr="preencoded.png">    </p:cNvPr>
           <p:cNvPicPr>
             <a:picLocks noChangeAspect="1"/>
           </p:cNvPicPr>
@@ -8871,7 +8910,7 @@
       </p:pic>
       <p:sp>
         <p:nvSpPr>
-          <p:cNvPr id="12" name="Text 8"/>
+          <p:cNvPr id="13" name="Text 9"/>
           <p:cNvSpPr/>
           <p:nvPr/>
         </p:nvSpPr>
@@ -8913,7 +8952,7 @@
       </p:sp>
       <p:sp>
         <p:nvSpPr>
-          <p:cNvPr id="13" name="Shape 9"/>
+          <p:cNvPr id="14" name="Shape 10"/>
           <p:cNvSpPr/>
           <p:nvPr/>
         </p:nvSpPr>
@@ -8933,7 +8972,7 @@
       </p:sp>
       <p:pic>
         <p:nvPicPr>
-          <p:cNvPr id="14" name="Image 2" descr="preencoded.png">    </p:cNvPr>
+          <p:cNvPr id="15" name="Image 2" descr="preencoded.png">    </p:cNvPr>
           <p:cNvPicPr>
             <a:picLocks noChangeAspect="1"/>
           </p:cNvPicPr>
@@ -8957,7 +8996,7 @@
       </p:pic>
       <p:sp>
         <p:nvSpPr>
-          <p:cNvPr id="15" name="Text 10"/>
+          <p:cNvPr id="16" name="Text 11"/>
           <p:cNvSpPr/>
           <p:nvPr/>
         </p:nvSpPr>
@@ -8999,7 +9038,7 @@
       </p:sp>
       <p:sp>
         <p:nvSpPr>
-          <p:cNvPr id="16" name="Shape 11"/>
+          <p:cNvPr id="17" name="Shape 12"/>
           <p:cNvSpPr/>
           <p:nvPr/>
         </p:nvSpPr>
@@ -9019,7 +9058,7 @@
       </p:sp>
       <p:pic>
         <p:nvPicPr>
-          <p:cNvPr id="17" name="Image 3" descr="preencoded.png">    </p:cNvPr>
+          <p:cNvPr id="18" name="Image 3" descr="preencoded.png">    </p:cNvPr>
           <p:cNvPicPr>
             <a:picLocks noChangeAspect="1"/>
           </p:cNvPicPr>
@@ -9043,7 +9082,7 @@
       </p:pic>
       <p:sp>
         <p:nvSpPr>
-          <p:cNvPr id="18" name="Text 12"/>
+          <p:cNvPr id="19" name="Text 13"/>
           <p:cNvSpPr/>
           <p:nvPr/>
         </p:nvSpPr>
@@ -9085,7 +9124,7 @@
       </p:sp>
       <p:sp>
         <p:nvSpPr>
-          <p:cNvPr id="19" name="Text 13"/>
+          <p:cNvPr id="20" name="Text 14"/>
           <p:cNvSpPr/>
           <p:nvPr/>
         </p:nvSpPr>
@@ -9124,7 +9163,7 @@
       </p:sp>
       <p:sp>
         <p:nvSpPr>
-          <p:cNvPr id="20" name="Text 14"/>
+          <p:cNvPr id="21" name="Text 15"/>
           <p:cNvSpPr/>
           <p:nvPr/>
         </p:nvSpPr>

--- a/Fluctus_Laadplan_Lommel.pptx
+++ b/Fluctus_Laadplan_Lommel.pptx
@@ -118,7 +118,7 @@
 </p:presentation>
 </file>
 
-<file path=ppt/charts/chart1.xml><?xml version="1.0" encoding="utf-8"?>
+<file path=ppt/charts/chart276.xml><?xml version="1.0" encoding="utf-8"?>
 <c:chartSpace xmlns:c="http://schemas.openxmlformats.org/drawingml/2006/chart" xmlns:a="http://schemas.openxmlformats.org/drawingml/2006/main" xmlns:r="http://schemas.openxmlformats.org/officeDocument/2006/relationships">
   <c:date1904 val="0"/>
   <c:roundedCorners val="1"/>
